--- a/static/decks/JINDALSTEL.NS.pptx
+++ b/static/decks/JINDALSTEL.NS.pptx
@@ -107,6 +107,451 @@
     </a:lvl9pPr>
   </p:defaultTextStyle>
 </p:presentation>
+</file>
+
+<file path=ppt/charts/chart1.xml><?xml version="1.0" encoding="utf-8"?>
+<c:chartSpace xmlns:c="http://schemas.openxmlformats.org/drawingml/2006/chart" xmlns:a="http://schemas.openxmlformats.org/drawingml/2006/main" xmlns:r="http://schemas.openxmlformats.org/officeDocument/2006/relationships">
+  <c:date1904 val="0"/>
+  <c:chart>
+    <c:autoTitleDeleted val="0"/>
+    <c:plotArea>
+      <c:lineChart>
+        <c:grouping val="standard"/>
+        <c:varyColors val="0"/>
+        <c:ser>
+          <c:idx val="0"/>
+          <c:order val="0"/>
+          <c:tx>
+            <c:strRef>
+              <c:f>Sheet1!$B$1</c:f>
+              <c:strCache>
+                <c:ptCount val="1"/>
+                <c:pt idx="0">
+                  <c:v>Close</c:v>
+                </c:pt>
+              </c:strCache>
+            </c:strRef>
+          </c:tx>
+          <c:spPr>
+            <a:ln w="19050">
+              <a:solidFill>
+                <a:srgbClr val="A28860"/>
+              </a:solidFill>
+            </a:ln>
+          </c:spPr>
+          <c:marker>
+            <c:symbol val="none"/>
+          </c:marker>
+          <c:cat>
+            <c:strRef>
+              <c:f>Sheet1!$A$2:$A$51</c:f>
+              <c:strCache>
+                <c:ptCount val="50"/>
+                <c:pt idx="0">
+                  <c:v>05-13</c:v>
+                </c:pt>
+                <c:pt idx="1">
+                  <c:v>05-20</c:v>
+                </c:pt>
+                <c:pt idx="2">
+                  <c:v>05-27</c:v>
+                </c:pt>
+                <c:pt idx="3">
+                  <c:v>06-03</c:v>
+                </c:pt>
+                <c:pt idx="4">
+                  <c:v>06-10</c:v>
+                </c:pt>
+                <c:pt idx="5">
+                  <c:v>06-17</c:v>
+                </c:pt>
+                <c:pt idx="6">
+                  <c:v>06-24</c:v>
+                </c:pt>
+                <c:pt idx="7">
+                  <c:v>07-01</c:v>
+                </c:pt>
+                <c:pt idx="8">
+                  <c:v>07-08</c:v>
+                </c:pt>
+                <c:pt idx="9">
+                  <c:v>07-15</c:v>
+                </c:pt>
+                <c:pt idx="10">
+                  <c:v>07-22</c:v>
+                </c:pt>
+                <c:pt idx="11">
+                  <c:v>07-29</c:v>
+                </c:pt>
+                <c:pt idx="12">
+                  <c:v>08-05</c:v>
+                </c:pt>
+                <c:pt idx="13">
+                  <c:v>08-12</c:v>
+                </c:pt>
+                <c:pt idx="14">
+                  <c:v>08-20</c:v>
+                </c:pt>
+                <c:pt idx="15">
+                  <c:v>08-28</c:v>
+                </c:pt>
+                <c:pt idx="16">
+                  <c:v>09-04</c:v>
+                </c:pt>
+                <c:pt idx="17">
+                  <c:v>09-11</c:v>
+                </c:pt>
+                <c:pt idx="18">
+                  <c:v>09-18</c:v>
+                </c:pt>
+                <c:pt idx="19">
+                  <c:v>09-25</c:v>
+                </c:pt>
+                <c:pt idx="20">
+                  <c:v>10-03</c:v>
+                </c:pt>
+                <c:pt idx="21">
+                  <c:v>10-10</c:v>
+                </c:pt>
+                <c:pt idx="22">
+                  <c:v>10-17</c:v>
+                </c:pt>
+                <c:pt idx="23">
+                  <c:v>10-27</c:v>
+                </c:pt>
+                <c:pt idx="24">
+                  <c:v>11-03</c:v>
+                </c:pt>
+                <c:pt idx="25">
+                  <c:v>11-11</c:v>
+                </c:pt>
+                <c:pt idx="26">
+                  <c:v>11-18</c:v>
+                </c:pt>
+                <c:pt idx="27">
+                  <c:v>11-25</c:v>
+                </c:pt>
+                <c:pt idx="28">
+                  <c:v>12-02</c:v>
+                </c:pt>
+                <c:pt idx="29">
+                  <c:v>12-09</c:v>
+                </c:pt>
+                <c:pt idx="30">
+                  <c:v>12-16</c:v>
+                </c:pt>
+                <c:pt idx="31">
+                  <c:v>12-23</c:v>
+                </c:pt>
+                <c:pt idx="32">
+                  <c:v>12-31</c:v>
+                </c:pt>
+                <c:pt idx="33">
+                  <c:v>01-07</c:v>
+                </c:pt>
+                <c:pt idx="34">
+                  <c:v>01-14</c:v>
+                </c:pt>
+                <c:pt idx="35">
+                  <c:v>01-21</c:v>
+                </c:pt>
+                <c:pt idx="36">
+                  <c:v>01-29</c:v>
+                </c:pt>
+                <c:pt idx="37">
+                  <c:v>02-05</c:v>
+                </c:pt>
+                <c:pt idx="38">
+                  <c:v>02-12</c:v>
+                </c:pt>
+                <c:pt idx="39">
+                  <c:v>02-19</c:v>
+                </c:pt>
+                <c:pt idx="40">
+                  <c:v>02-26</c:v>
+                </c:pt>
+                <c:pt idx="41">
+                  <c:v>03-06</c:v>
+                </c:pt>
+                <c:pt idx="42">
+                  <c:v>03-13</c:v>
+                </c:pt>
+                <c:pt idx="43">
+                  <c:v>03-20</c:v>
+                </c:pt>
+                <c:pt idx="44">
+                  <c:v>03-30</c:v>
+                </c:pt>
+                <c:pt idx="45">
+                  <c:v>04-08</c:v>
+                </c:pt>
+                <c:pt idx="46">
+                  <c:v>04-16</c:v>
+                </c:pt>
+                <c:pt idx="47">
+                  <c:v>04-23</c:v>
+                </c:pt>
+                <c:pt idx="48">
+                  <c:v>04-30</c:v>
+                </c:pt>
+                <c:pt idx="49">
+                  <c:v>05-07</c:v>
+                </c:pt>
+              </c:strCache>
+            </c:strRef>
+          </c:cat>
+          <c:val>
+            <c:numRef>
+              <c:f>Sheet1!$B$2:$B$51</c:f>
+              <c:numCache>
+                <c:formatCode>General</c:formatCode>
+                <c:ptCount val="50"/>
+                <c:pt idx="0">
+                  <c:v>909.7000122070312</c:v>
+                </c:pt>
+                <c:pt idx="1">
+                  <c:v>957.5999755859375</c:v>
+                </c:pt>
+                <c:pt idx="2">
+                  <c:v>947.5</c:v>
+                </c:pt>
+                <c:pt idx="3">
+                  <c:v>946.4000244140625</c:v>
+                </c:pt>
+                <c:pt idx="4">
+                  <c:v>973.7000122070312</c:v>
+                </c:pt>
+                <c:pt idx="5">
+                  <c:v>891.0</c:v>
+                </c:pt>
+                <c:pt idx="6">
+                  <c:v>924.2000122070312</c:v>
+                </c:pt>
+                <c:pt idx="7">
+                  <c:v>951.25</c:v>
+                </c:pt>
+                <c:pt idx="8">
+                  <c:v>951.0999755859375</c:v>
+                </c:pt>
+                <c:pt idx="9">
+                  <c:v>943.8499755859375</c:v>
+                </c:pt>
+                <c:pt idx="10">
+                  <c:v>965.0</c:v>
+                </c:pt>
+                <c:pt idx="11">
+                  <c:v>984.3499755859375</c:v>
+                </c:pt>
+                <c:pt idx="12">
+                  <c:v>999.7999877929688</c:v>
+                </c:pt>
+                <c:pt idx="13">
+                  <c:v>998.5</c:v>
+                </c:pt>
+                <c:pt idx="14">
+                  <c:v>1016.25</c:v>
+                </c:pt>
+                <c:pt idx="15">
+                  <c:v>964.7000122070312</c:v>
+                </c:pt>
+                <c:pt idx="16">
+                  <c:v>1031.8499755859375</c:v>
+                </c:pt>
+                <c:pt idx="17">
+                  <c:v>1040.4000244140625</c:v>
+                </c:pt>
+                <c:pt idx="18">
+                  <c:v>1047.6500244140625</c:v>
+                </c:pt>
+                <c:pt idx="19">
+                  <c:v>1051.699951171875</c:v>
+                </c:pt>
+                <c:pt idx="20">
+                  <c:v>1076.5</c:v>
+                </c:pt>
+                <c:pt idx="21">
+                  <c:v>1015.2000122070312</c:v>
+                </c:pt>
+                <c:pt idx="22">
+                  <c:v>1007.5999755859375</c:v>
+                </c:pt>
+                <c:pt idx="23">
+                  <c:v>1034.300048828125</c:v>
+                </c:pt>
+                <c:pt idx="24">
+                  <c:v>1077.0</c:v>
+                </c:pt>
+                <c:pt idx="25">
+                  <c:v>1080.199951171875</c:v>
+                </c:pt>
+                <c:pt idx="26">
+                  <c:v>1066.300048828125</c:v>
+                </c:pt>
+                <c:pt idx="27">
+                  <c:v>1022.5999755859375</c:v>
+                </c:pt>
+                <c:pt idx="28">
+                  <c:v>1028.800048828125</c:v>
+                </c:pt>
+                <c:pt idx="29">
+                  <c:v>1002.7999877929688</c:v>
+                </c:pt>
+                <c:pt idx="30">
+                  <c:v>1011.2000122070312</c:v>
+                </c:pt>
+                <c:pt idx="31">
+                  <c:v>1012.5999755859375</c:v>
+                </c:pt>
+                <c:pt idx="32">
+                  <c:v>1053.800048828125</c:v>
+                </c:pt>
+                <c:pt idx="33">
+                  <c:v>1074.699951171875</c:v>
+                </c:pt>
+                <c:pt idx="34">
+                  <c:v>1040.699951171875</c:v>
+                </c:pt>
+                <c:pt idx="35">
+                  <c:v>1041.4000244140625</c:v>
+                </c:pt>
+                <c:pt idx="36">
+                  <c:v>1159.5999755859375</c:v>
+                </c:pt>
+                <c:pt idx="37">
+                  <c:v>1178.0</c:v>
+                </c:pt>
+                <c:pt idx="38">
+                  <c:v>1203.4000244140625</c:v>
+                </c:pt>
+                <c:pt idx="39">
+                  <c:v>1211.0999755859375</c:v>
+                </c:pt>
+                <c:pt idx="40">
+                  <c:v>1261.0</c:v>
+                </c:pt>
+                <c:pt idx="41">
+                  <c:v>1180.4000244140625</c:v>
+                </c:pt>
+                <c:pt idx="42">
+                  <c:v>1143.300048828125</c:v>
+                </c:pt>
+                <c:pt idx="43">
+                  <c:v>1186.5</c:v>
+                </c:pt>
+                <c:pt idx="44">
+                  <c:v>1113.0999755859375</c:v>
+                </c:pt>
+                <c:pt idx="45">
+                  <c:v>1213.0999755859375</c:v>
+                </c:pt>
+                <c:pt idx="46">
+                  <c:v>1228.300048828125</c:v>
+                </c:pt>
+                <c:pt idx="47">
+                  <c:v>1254.5</c:v>
+                </c:pt>
+                <c:pt idx="48">
+                  <c:v>1223.0999755859375</c:v>
+                </c:pt>
+                <c:pt idx="49">
+                  <c:v>1258.199951171875</c:v>
+                </c:pt>
+              </c:numCache>
+            </c:numRef>
+          </c:val>
+          <c:smooth val="0"/>
+        </c:ser>
+        <c:marker val="1"/>
+        <c:smooth val="0"/>
+        <c:axId val="2118791784"/>
+        <c:axId val="2140495176"/>
+      </c:lineChart>
+      <c:catAx>
+        <c:axId val="2118791784"/>
+        <c:scaling>
+          <c:orientation val="minMax"/>
+        </c:scaling>
+        <c:delete val="0"/>
+        <c:axPos val="b"/>
+        <c:majorTickMark val="out"/>
+        <c:minorTickMark val="none"/>
+        <c:tickLblPos val="nextTo"/>
+        <c:spPr>
+          <a:ln>
+            <a:noFill/>
+          </a:ln>
+        </c:spPr>
+        <c:txPr>
+          <a:bodyPr/>
+          <a:lstStyle/>
+          <a:p>
+            <a:pPr>
+              <a:defRPr sz="700">
+                <a:solidFill>
+                  <a:srgbClr val="9A9A9A"/>
+                </a:solidFill>
+                <a:latin typeface="Calibri"/>
+              </a:defRPr>
+            </a:pPr>
+          </a:p>
+        </c:txPr>
+        <c:crossAx val="2140495176"/>
+        <c:crosses val="autoZero"/>
+        <c:auto val="1"/>
+        <c:lblAlgn val="ctr"/>
+        <c:lblOffset val="100"/>
+        <c:noMultiLvlLbl val="0"/>
+      </c:catAx>
+      <c:valAx>
+        <c:axId val="2140495176"/>
+        <c:scaling/>
+        <c:delete val="0"/>
+        <c:axPos val="l"/>
+        <c:majorGridlines/>
+        <c:majorTickMark val="out"/>
+        <c:minorTickMark val="none"/>
+        <c:tickLblPos val="nextTo"/>
+        <c:spPr>
+          <a:ln>
+            <a:noFill/>
+          </a:ln>
+        </c:spPr>
+        <c:txPr>
+          <a:bodyPr/>
+          <a:lstStyle/>
+          <a:p>
+            <a:pPr>
+              <a:defRPr sz="700">
+                <a:solidFill>
+                  <a:srgbClr val="9A9A9A"/>
+                </a:solidFill>
+                <a:latin typeface="Calibri"/>
+              </a:defRPr>
+            </a:pPr>
+          </a:p>
+        </c:txPr>
+        <c:crossAx val="2118791784"/>
+        <c:crosses val="autoZero"/>
+      </c:valAx>
+    </c:plotArea>
+    <c:plotVisOnly val="1"/>
+    <c:dispBlanksAs val="gap"/>
+    <c:showDLblsOverMax val="0"/>
+  </c:chart>
+  <c:txPr>
+    <a:bodyPr/>
+    <a:lstStyle/>
+    <a:p>
+      <a:pPr>
+        <a:defRPr sz="1800"/>
+      </a:pPr>
+      <a:endParaRPr lang="en-US"/>
+    </a:p>
+  </c:txPr>
+  <c:externalData r:id="rId1">
+    <c:autoUpdate val="0"/>
+  </c:externalData>
+</c:chartSpace>
 </file>
 
 <file path=ppt/slideLayouts/slideLayout1.xml><?xml version="1.0" encoding="utf-8"?>
@@ -3339,7 +3784,7 @@
                 </a:solidFill>
                 <a:latin typeface="Georgia"/>
               </a:rPr>
-              <a:t>JINDALSTEL.NS</a:t>
+              <a:t>Jindal Steel &amp; Power Limited</a:t>
             </a:r>
           </a:p>
         </p:txBody>
@@ -3374,7 +3819,7 @@
                 </a:solidFill>
                 <a:latin typeface="Calibri"/>
               </a:rPr>
-              <a:t>JINDALSTEL.NS  ·  —  ·  —  ·  —</a:t>
+              <a:t>JINDALSTEL.NS  ·  Materials  ·  Steel  ·  —</a:t>
             </a:r>
           </a:p>
         </p:txBody>
@@ -3808,7 +4253,7 @@
                 </a:solidFill>
                 <a:latin typeface="Calibri"/>
               </a:rPr>
-              <a:t>1,277.55</a:t>
+              <a:t>INR 1,277.55</a:t>
             </a:r>
           </a:p>
         </p:txBody>
@@ -3968,7 +4413,7 @@
                 </a:solidFill>
                 <a:latin typeface="Calibri"/>
               </a:rPr>
-              <a:t>+255410.0%</a:t>
+              <a:t>+5.2%</a:t>
             </a:r>
           </a:p>
         </p:txBody>
@@ -4117,7 +4562,7 @@
                 </a:solidFill>
                 <a:latin typeface="Calibri"/>
               </a:rPr>
-              <a:t>0.50</a:t>
+              <a:t>INR 1,214.30</a:t>
             </a:r>
           </a:p>
         </p:txBody>
@@ -4187,7 +4632,7 @@
                 </a:solidFill>
                 <a:latin typeface="Calibri"/>
               </a:rPr>
-              <a:t>—</a:t>
+              <a:t>INR 1.24T</a:t>
             </a:r>
           </a:p>
         </p:txBody>
@@ -4327,7 +4772,7 @@
                 </a:solidFill>
                 <a:latin typeface="Calibri"/>
               </a:rPr>
-              <a:t>—</a:t>
+              <a:t>12.4x</a:t>
             </a:r>
           </a:p>
         </p:txBody>
@@ -4397,7 +4842,7 @@
                 </a:solidFill>
                 <a:latin typeface="Calibri"/>
               </a:rPr>
-              <a:t>—</a:t>
+              <a:t>0.26%</a:t>
             </a:r>
           </a:p>
         </p:txBody>
@@ -4467,7 +4912,7 @@
                 </a:solidFill>
                 <a:latin typeface="Calibri"/>
               </a:rPr>
-              <a:t/>
+              <a:t>INR</a:t>
             </a:r>
           </a:p>
         </p:txBody>
@@ -4612,11 +5057,11 @@
             <a:r>
               <a:rPr sz="1400" b="0">
                 <a:solidFill>
-                  <a:srgbClr val="5C5C5C"/>
-                </a:solidFill>
-                <a:latin typeface="Calibri"/>
-              </a:rPr>
-              <a:t>—</a:t>
+                  <a:srgbClr val="2F7D4F"/>
+                </a:solidFill>
+                <a:latin typeface="Calibri"/>
+              </a:rPr>
+              <a:t>+2.4%</a:t>
             </a:r>
           </a:p>
         </p:txBody>
@@ -4682,11 +5127,11 @@
             <a:r>
               <a:rPr sz="1400" b="0">
                 <a:solidFill>
-                  <a:srgbClr val="5C5C5C"/>
-                </a:solidFill>
-                <a:latin typeface="Calibri"/>
-              </a:rPr>
-              <a:t>—</a:t>
+                  <a:srgbClr val="B83227"/>
+                </a:solidFill>
+                <a:latin typeface="Calibri"/>
+              </a:rPr>
+              <a:t>-1.7%</a:t>
             </a:r>
           </a:p>
         </p:txBody>
@@ -4752,11 +5197,11 @@
             <a:r>
               <a:rPr sz="1400" b="0">
                 <a:solidFill>
-                  <a:srgbClr val="5C5C5C"/>
-                </a:solidFill>
-                <a:latin typeface="Calibri"/>
-              </a:rPr>
-              <a:t>—</a:t>
+                  <a:srgbClr val="2F7D4F"/>
+                </a:solidFill>
+                <a:latin typeface="Calibri"/>
+              </a:rPr>
+              <a:t>+2.0%</a:t>
             </a:r>
           </a:p>
         </p:txBody>
@@ -4822,11 +5267,11 @@
             <a:r>
               <a:rPr sz="1400" b="0">
                 <a:solidFill>
-                  <a:srgbClr val="5C5C5C"/>
-                </a:solidFill>
-                <a:latin typeface="Calibri"/>
-              </a:rPr>
-              <a:t>—</a:t>
+                  <a:srgbClr val="2F7D4F"/>
+                </a:solidFill>
+                <a:latin typeface="Calibri"/>
+              </a:rPr>
+              <a:t>+4.5%</a:t>
             </a:r>
           </a:p>
         </p:txBody>
@@ -4892,11 +5337,11 @@
             <a:r>
               <a:rPr sz="1400" b="0">
                 <a:solidFill>
-                  <a:srgbClr val="5C5C5C"/>
-                </a:solidFill>
-                <a:latin typeface="Calibri"/>
-              </a:rPr>
-              <a:t>—</a:t>
+                  <a:srgbClr val="2F7D4F"/>
+                </a:solidFill>
+                <a:latin typeface="Calibri"/>
+              </a:rPr>
+              <a:t>+16.2%</a:t>
             </a:r>
           </a:p>
         </p:txBody>
@@ -4962,11 +5407,11 @@
             <a:r>
               <a:rPr sz="1400" b="0">
                 <a:solidFill>
-                  <a:srgbClr val="5C5C5C"/>
-                </a:solidFill>
-                <a:latin typeface="Calibri"/>
-              </a:rPr>
-              <a:t>—</a:t>
+                  <a:srgbClr val="2F7D4F"/>
+                </a:solidFill>
+                <a:latin typeface="Calibri"/>
+              </a:rPr>
+              <a:t>+16.3%</a:t>
             </a:r>
           </a:p>
         </p:txBody>
@@ -5080,7 +5525,7 @@
                 </a:solidFill>
                 <a:latin typeface="Calibri"/>
               </a:rPr>
-              <a:t> 0.00</a:t>
+              <a:t>INR 887.45</a:t>
             </a:r>
           </a:p>
         </p:txBody>
@@ -5115,7 +5560,7 @@
                 </a:solidFill>
                 <a:latin typeface="Calibri"/>
               </a:rPr>
-              <a:t> 1.00</a:t>
+              <a:t>INR 1,288.80</a:t>
             </a:r>
           </a:p>
         </p:txBody>
@@ -5172,7 +5617,7 @@
         <p:spPr>
           <a:xfrm>
             <a:off x="1280160" y="6400799"/>
-            <a:ext cx="2148839" cy="54864"/>
+            <a:ext cx="3499929" cy="54864"/>
           </a:xfrm>
           <a:prstGeom prst="rect">
             <a:avLst/>
@@ -5214,7 +5659,7 @@
         </p:nvSpPr>
         <p:spPr>
           <a:xfrm>
-            <a:off x="3346703" y="6345936"/>
+            <a:off x="4697793" y="6345936"/>
             <a:ext cx="164592" cy="164592"/>
           </a:xfrm>
           <a:prstGeom prst="diamond">
@@ -5257,7 +5702,7 @@
         </p:nvSpPr>
         <p:spPr>
           <a:xfrm>
-            <a:off x="2788920" y="6565392"/>
+            <a:off x="4140009" y="6565392"/>
             <a:ext cx="1280160" cy="182880"/>
           </a:xfrm>
           <a:prstGeom prst="rect">
@@ -5279,7 +5724,7 @@
                 </a:solidFill>
                 <a:latin typeface="Calibri"/>
               </a:rPr>
-              <a:t>Current   0.50</a:t>
+              <a:t>Current  INR 1,214.30</a:t>
             </a:r>
           </a:p>
         </p:txBody>
@@ -6002,7 +6447,7 @@
                 </a:solidFill>
                 <a:latin typeface="Calibri"/>
               </a:rPr>
-              <a:t>Source: investing  |  Generated 13 May 2026  |  Analyst: Jabal Research</a:t>
+              <a:t>Source: investing, marketscreener, yahoo  |  Generated 13 May 2026  |  Analyst: Jabal Research</a:t>
             </a:r>
           </a:p>
         </p:txBody>
@@ -6548,7 +6993,7 @@
                 </a:solidFill>
                 <a:latin typeface="Calibri"/>
               </a:rPr>
-              <a:t>Jabal maintains a constructive view into the upcoming print. the company sits in the — sector (—). Street consensus is buy (31 analysts covering); consensus target 1277.55. The thesis hinges on three factors: demand trajectory through H2, feedstock/input-cost discipline, and management's tone on guidance during the call. We expect the print itself to be within consensus bounds; the read on forward commentary is the swing factor.</a:t>
+              <a:t>Jabal maintains a constructive view into the upcoming print. Jindal Steel &amp; Power Limited sits in the Materials sector (Steel). Street consensus is buy (31 analysts covering); consensus target 1277.55. The shares trade at a P/E around 12.4x trailing earnings. The macro and commodity backdrop is anchored by coking_coal at 230 $/mt fob Australia (-22.0% YoY); iron_ore at 102 $/dmt cfr China (-12.0% YoY). Macro context: local-economy GDP growth recently at 6.5%. The thesis hinges on three factors: demand trajectory through H2, feedstock/input-cost discipline, and management's tone on guidance during the call. We expect the print itself to be within consensus bounds; the read on forward commentary is the swing factor.</a:t>
             </a:r>
           </a:p>
         </p:txBody>
@@ -7772,7 +8217,7 @@
                 </a:solidFill>
                 <a:latin typeface="Calibri"/>
               </a:rPr>
-              <a:t>—</a:t>
+              <a:t>0.26%</a:t>
             </a:r>
           </a:p>
         </p:txBody>
@@ -8963,7 +9408,7 @@
                 </a:solidFill>
                 <a:latin typeface="Calibri"/>
               </a:rPr>
-              <a:t>Source: investing  |  Generated 13 May 2026  |  Analyst: Jabal Research</a:t>
+              <a:t>Source: investing, marketscreener, yahoo  |  Generated 13 May 2026  |  Analyst: Jabal Research</a:t>
             </a:r>
           </a:p>
         </p:txBody>
@@ -9419,46 +9864,29 @@
                 </a:solidFill>
                 <a:latin typeface="Calibri"/>
               </a:rPr>
-              <a:t>52-WEEK PRICE  ·  </a:t>
-            </a:r>
-          </a:p>
-        </p:txBody>
-      </p:sp>
-      <p:sp>
-        <p:nvSpPr>
-          <p:cNvPr id="11" name="TextBox 10"/>
-          <p:cNvSpPr txBox="1"/>
-          <p:nvPr/>
-        </p:nvSpPr>
-        <p:spPr>
-          <a:xfrm>
-            <a:off x="411480" y="2894076"/>
-            <a:ext cx="2926079" cy="274320"/>
-          </a:xfrm>
-          <a:prstGeom prst="rect">
-            <a:avLst/>
-          </a:prstGeom>
-          <a:noFill/>
-        </p:spPr>
-        <p:txBody>
-          <a:bodyPr wrap="square" lIns="0" rIns="0" tIns="0" bIns="0" anchor="t">
-            <a:spAutoFit/>
-          </a:bodyPr>
-          <a:lstStyle/>
-          <a:p>
-            <a:pPr algn="ctr"/>
-            <a:r>
-              <a:rPr sz="1000" b="0">
-                <a:solidFill>
-                  <a:srgbClr val="9A9A9A"/>
-                </a:solidFill>
-                <a:latin typeface="Calibri"/>
-              </a:rPr>
-              <a:t>No price history available</a:t>
-            </a:r>
-          </a:p>
-        </p:txBody>
-      </p:sp>
+              <a:t>52-WEEK PRICE  ·  INR</a:t>
+            </a:r>
+          </a:p>
+        </p:txBody>
+      </p:sp>
+      <p:graphicFrame>
+        <p:nvGraphicFramePr>
+          <p:cNvPr id="11" name="Chart 10"/>
+          <p:cNvGraphicFramePr>
+            <a:graphicFrameLocks noGrp="1"/>
+          </p:cNvGraphicFramePr>
+          <p:nvPr/>
+        </p:nvGraphicFramePr>
+        <p:xfrm>
+          <a:off x="411480" y="2029967"/>
+          <a:ext cx="2926079" cy="1920240"/>
+        </p:xfrm>
+        <a:graphic>
+          <a:graphicData uri="http://schemas.openxmlformats.org/drawingml/2006/chart">
+            <c:chart xmlns:c="http://schemas.openxmlformats.org/drawingml/2006/chart" r:id="rId2"/>
+          </a:graphicData>
+        </a:graphic>
+      </p:graphicFrame>
       <p:sp>
         <p:nvSpPr>
           <p:cNvPr id="12" name="TextBox 11"/>
@@ -9502,36 +9930,1467 @@
         </p:nvSpPr>
         <p:spPr>
           <a:xfrm>
-            <a:off x="3520440" y="2779776"/>
-            <a:ext cx="2926079" cy="274320"/>
-          </a:xfrm>
-          <a:prstGeom prst="rect">
-            <a:avLst/>
-          </a:prstGeom>
-          <a:noFill/>
-        </p:spPr>
-        <p:txBody>
-          <a:bodyPr wrap="square" lIns="0" rIns="0" tIns="0" bIns="0" anchor="t">
-            <a:spAutoFit/>
-          </a:bodyPr>
+            <a:off x="3520440" y="2066543"/>
+            <a:ext cx="502920" cy="182880"/>
+          </a:xfrm>
+          <a:prstGeom prst="rect">
+            <a:avLst/>
+          </a:prstGeom>
+          <a:noFill/>
+        </p:spPr>
+        <p:txBody>
+          <a:bodyPr wrap="square" lIns="0" rIns="0" tIns="0" bIns="0" anchor="t">
+            <a:spAutoFit/>
+          </a:bodyPr>
+          <a:lstStyle/>
+          <a:p>
+            <a:pPr algn="l"/>
+            <a:r>
+              <a:rPr sz="1000" b="0">
+                <a:solidFill>
+                  <a:srgbClr val="1A1A1A"/>
+                </a:solidFill>
+                <a:latin typeface="Calibri"/>
+              </a:rPr>
+              <a:t>FY2021</a:t>
+            </a:r>
+          </a:p>
+        </p:txBody>
+      </p:sp>
+      <p:sp>
+        <p:nvSpPr>
+          <p:cNvPr id="14" name="Rectangle 13"/>
+          <p:cNvSpPr/>
+          <p:nvPr/>
+        </p:nvSpPr>
+        <p:spPr>
+          <a:xfrm>
+            <a:off x="4023360" y="2121408"/>
+            <a:ext cx="156048" cy="73152"/>
+          </a:xfrm>
+          <a:prstGeom prst="rect">
+            <a:avLst/>
+          </a:prstGeom>
+          <a:solidFill>
+            <a:srgbClr val="EFE8DC"/>
+          </a:solidFill>
+          <a:ln>
+            <a:noFill/>
+          </a:ln>
+        </p:spPr>
+        <p:style>
+          <a:lnRef idx="1">
+            <a:schemeClr val="accent1"/>
+          </a:lnRef>
+          <a:fillRef idx="3">
+            <a:schemeClr val="accent1"/>
+          </a:fillRef>
+          <a:effectRef idx="2">
+            <a:schemeClr val="accent1"/>
+          </a:effectRef>
+          <a:fontRef idx="minor">
+            <a:schemeClr val="lt1"/>
+          </a:fontRef>
+        </p:style>
+        <p:txBody>
+          <a:bodyPr rtlCol="0" anchor="ctr"/>
           <a:lstStyle/>
           <a:p>
             <a:pPr algn="ctr"/>
+          </a:p>
+        </p:txBody>
+      </p:sp>
+      <p:sp>
+        <p:nvSpPr>
+          <p:cNvPr id="15" name="Oval 14"/>
+          <p:cNvSpPr/>
+          <p:nvPr/>
+        </p:nvSpPr>
+        <p:spPr>
+          <a:xfrm>
+            <a:off x="4133688" y="2103120"/>
+            <a:ext cx="91440" cy="109728"/>
+          </a:xfrm>
+          <a:prstGeom prst="ellipse">
+            <a:avLst/>
+          </a:prstGeom>
+          <a:solidFill>
+            <a:srgbClr val="7E6849"/>
+          </a:solidFill>
+          <a:ln>
+            <a:noFill/>
+          </a:ln>
+        </p:spPr>
+        <p:style>
+          <a:lnRef idx="1">
+            <a:schemeClr val="accent1"/>
+          </a:lnRef>
+          <a:fillRef idx="3">
+            <a:schemeClr val="accent1"/>
+          </a:fillRef>
+          <a:effectRef idx="2">
+            <a:schemeClr val="accent1"/>
+          </a:effectRef>
+          <a:fontRef idx="minor">
+            <a:schemeClr val="lt1"/>
+          </a:fontRef>
+        </p:style>
+        <p:txBody>
+          <a:bodyPr rtlCol="0" anchor="ctr"/>
+          <a:lstStyle/>
+          <a:p>
+            <a:pPr algn="ctr"/>
+          </a:p>
+        </p:txBody>
+      </p:sp>
+      <p:sp>
+        <p:nvSpPr>
+          <p:cNvPr id="16" name="TextBox 15"/>
+          <p:cNvSpPr txBox="1"/>
+          <p:nvPr/>
+        </p:nvSpPr>
+        <p:spPr>
+          <a:xfrm>
+            <a:off x="4225128" y="2084831"/>
+            <a:ext cx="411480" cy="182880"/>
+          </a:xfrm>
+          <a:prstGeom prst="rect">
+            <a:avLst/>
+          </a:prstGeom>
+          <a:noFill/>
+        </p:spPr>
+        <p:txBody>
+          <a:bodyPr wrap="square" lIns="0" rIns="0" tIns="0" bIns="0" anchor="t">
+            <a:spAutoFit/>
+          </a:bodyPr>
+          <a:lstStyle/>
+          <a:p>
+            <a:pPr algn="l"/>
             <a:r>
               <a:rPr sz="1000" b="0">
                 <a:solidFill>
+                  <a:srgbClr val="1A1A1A"/>
+                </a:solidFill>
+                <a:latin typeface="Calibri"/>
+              </a:rPr>
+              <a:t>9.6x</a:t>
+            </a:r>
+          </a:p>
+        </p:txBody>
+      </p:sp>
+      <p:sp>
+        <p:nvSpPr>
+          <p:cNvPr id="17" name="TextBox 16"/>
+          <p:cNvSpPr txBox="1"/>
+          <p:nvPr/>
+        </p:nvSpPr>
+        <p:spPr>
+          <a:xfrm>
+            <a:off x="3520440" y="2340863"/>
+            <a:ext cx="502920" cy="182880"/>
+          </a:xfrm>
+          <a:prstGeom prst="rect">
+            <a:avLst/>
+          </a:prstGeom>
+          <a:noFill/>
+        </p:spPr>
+        <p:txBody>
+          <a:bodyPr wrap="square" lIns="0" rIns="0" tIns="0" bIns="0" anchor="t">
+            <a:spAutoFit/>
+          </a:bodyPr>
+          <a:lstStyle/>
+          <a:p>
+            <a:pPr algn="l"/>
+            <a:r>
+              <a:rPr sz="1000" b="0">
+                <a:solidFill>
+                  <a:srgbClr val="1A1A1A"/>
+                </a:solidFill>
+                <a:latin typeface="Calibri"/>
+              </a:rPr>
+              <a:t>FY2022</a:t>
+            </a:r>
+          </a:p>
+        </p:txBody>
+      </p:sp>
+      <p:sp>
+        <p:nvSpPr>
+          <p:cNvPr id="18" name="Rectangle 17"/>
+          <p:cNvSpPr/>
+          <p:nvPr/>
+        </p:nvSpPr>
+        <p:spPr>
+          <a:xfrm>
+            <a:off x="4023360" y="2395727"/>
+            <a:ext cx="141793" cy="73152"/>
+          </a:xfrm>
+          <a:prstGeom prst="rect">
+            <a:avLst/>
+          </a:prstGeom>
+          <a:solidFill>
+            <a:srgbClr val="EFE8DC"/>
+          </a:solidFill>
+          <a:ln>
+            <a:noFill/>
+          </a:ln>
+        </p:spPr>
+        <p:style>
+          <a:lnRef idx="1">
+            <a:schemeClr val="accent1"/>
+          </a:lnRef>
+          <a:fillRef idx="3">
+            <a:schemeClr val="accent1"/>
+          </a:fillRef>
+          <a:effectRef idx="2">
+            <a:schemeClr val="accent1"/>
+          </a:effectRef>
+          <a:fontRef idx="minor">
+            <a:schemeClr val="lt1"/>
+          </a:fontRef>
+        </p:style>
+        <p:txBody>
+          <a:bodyPr rtlCol="0" anchor="ctr"/>
+          <a:lstStyle/>
+          <a:p>
+            <a:pPr algn="ctr"/>
+          </a:p>
+        </p:txBody>
+      </p:sp>
+      <p:sp>
+        <p:nvSpPr>
+          <p:cNvPr id="19" name="Oval 18"/>
+          <p:cNvSpPr/>
+          <p:nvPr/>
+        </p:nvSpPr>
+        <p:spPr>
+          <a:xfrm>
+            <a:off x="4119433" y="2377439"/>
+            <a:ext cx="91440" cy="109728"/>
+          </a:xfrm>
+          <a:prstGeom prst="ellipse">
+            <a:avLst/>
+          </a:prstGeom>
+          <a:solidFill>
+            <a:srgbClr val="7E6849"/>
+          </a:solidFill>
+          <a:ln>
+            <a:noFill/>
+          </a:ln>
+        </p:spPr>
+        <p:style>
+          <a:lnRef idx="1">
+            <a:schemeClr val="accent1"/>
+          </a:lnRef>
+          <a:fillRef idx="3">
+            <a:schemeClr val="accent1"/>
+          </a:fillRef>
+          <a:effectRef idx="2">
+            <a:schemeClr val="accent1"/>
+          </a:effectRef>
+          <a:fontRef idx="minor">
+            <a:schemeClr val="lt1"/>
+          </a:fontRef>
+        </p:style>
+        <p:txBody>
+          <a:bodyPr rtlCol="0" anchor="ctr"/>
+          <a:lstStyle/>
+          <a:p>
+            <a:pPr algn="ctr"/>
+          </a:p>
+        </p:txBody>
+      </p:sp>
+      <p:sp>
+        <p:nvSpPr>
+          <p:cNvPr id="20" name="TextBox 19"/>
+          <p:cNvSpPr txBox="1"/>
+          <p:nvPr/>
+        </p:nvSpPr>
+        <p:spPr>
+          <a:xfrm>
+            <a:off x="4210873" y="2359151"/>
+            <a:ext cx="411480" cy="182880"/>
+          </a:xfrm>
+          <a:prstGeom prst="rect">
+            <a:avLst/>
+          </a:prstGeom>
+          <a:noFill/>
+        </p:spPr>
+        <p:txBody>
+          <a:bodyPr wrap="square" lIns="0" rIns="0" tIns="0" bIns="0" anchor="t">
+            <a:spAutoFit/>
+          </a:bodyPr>
+          <a:lstStyle/>
+          <a:p>
+            <a:pPr algn="l"/>
+            <a:r>
+              <a:rPr sz="1000" b="0">
+                <a:solidFill>
+                  <a:srgbClr val="1A1A1A"/>
+                </a:solidFill>
+                <a:latin typeface="Calibri"/>
+              </a:rPr>
+              <a:t>9.4x</a:t>
+            </a:r>
+          </a:p>
+        </p:txBody>
+      </p:sp>
+      <p:sp>
+        <p:nvSpPr>
+          <p:cNvPr id="21" name="TextBox 20"/>
+          <p:cNvSpPr txBox="1"/>
+          <p:nvPr/>
+        </p:nvSpPr>
+        <p:spPr>
+          <a:xfrm>
+            <a:off x="3520440" y="2615184"/>
+            <a:ext cx="502920" cy="182880"/>
+          </a:xfrm>
+          <a:prstGeom prst="rect">
+            <a:avLst/>
+          </a:prstGeom>
+          <a:noFill/>
+        </p:spPr>
+        <p:txBody>
+          <a:bodyPr wrap="square" lIns="0" rIns="0" tIns="0" bIns="0" anchor="t">
+            <a:spAutoFit/>
+          </a:bodyPr>
+          <a:lstStyle/>
+          <a:p>
+            <a:pPr algn="l"/>
+            <a:r>
+              <a:rPr sz="1000" b="0">
+                <a:solidFill>
+                  <a:srgbClr val="1A1A1A"/>
+                </a:solidFill>
+                <a:latin typeface="Calibri"/>
+              </a:rPr>
+              <a:t>FY2023</a:t>
+            </a:r>
+          </a:p>
+        </p:txBody>
+      </p:sp>
+      <p:sp>
+        <p:nvSpPr>
+          <p:cNvPr id="22" name="Rectangle 21"/>
+          <p:cNvSpPr/>
+          <p:nvPr/>
+        </p:nvSpPr>
+        <p:spPr>
+          <a:xfrm>
+            <a:off x="4023360" y="2670048"/>
+            <a:ext cx="483149" cy="73152"/>
+          </a:xfrm>
+          <a:prstGeom prst="rect">
+            <a:avLst/>
+          </a:prstGeom>
+          <a:solidFill>
+            <a:srgbClr val="EFE8DC"/>
+          </a:solidFill>
+          <a:ln>
+            <a:noFill/>
+          </a:ln>
+        </p:spPr>
+        <p:style>
+          <a:lnRef idx="1">
+            <a:schemeClr val="accent1"/>
+          </a:lnRef>
+          <a:fillRef idx="3">
+            <a:schemeClr val="accent1"/>
+          </a:fillRef>
+          <a:effectRef idx="2">
+            <a:schemeClr val="accent1"/>
+          </a:effectRef>
+          <a:fontRef idx="minor">
+            <a:schemeClr val="lt1"/>
+          </a:fontRef>
+        </p:style>
+        <p:txBody>
+          <a:bodyPr rtlCol="0" anchor="ctr"/>
+          <a:lstStyle/>
+          <a:p>
+            <a:pPr algn="ctr"/>
+          </a:p>
+        </p:txBody>
+      </p:sp>
+      <p:sp>
+        <p:nvSpPr>
+          <p:cNvPr id="23" name="Oval 22"/>
+          <p:cNvSpPr/>
+          <p:nvPr/>
+        </p:nvSpPr>
+        <p:spPr>
+          <a:xfrm>
+            <a:off x="4460789" y="2651760"/>
+            <a:ext cx="91440" cy="109728"/>
+          </a:xfrm>
+          <a:prstGeom prst="ellipse">
+            <a:avLst/>
+          </a:prstGeom>
+          <a:solidFill>
+            <a:srgbClr val="7E6849"/>
+          </a:solidFill>
+          <a:ln>
+            <a:noFill/>
+          </a:ln>
+        </p:spPr>
+        <p:style>
+          <a:lnRef idx="1">
+            <a:schemeClr val="accent1"/>
+          </a:lnRef>
+          <a:fillRef idx="3">
+            <a:schemeClr val="accent1"/>
+          </a:fillRef>
+          <a:effectRef idx="2">
+            <a:schemeClr val="accent1"/>
+          </a:effectRef>
+          <a:fontRef idx="minor">
+            <a:schemeClr val="lt1"/>
+          </a:fontRef>
+        </p:style>
+        <p:txBody>
+          <a:bodyPr rtlCol="0" anchor="ctr"/>
+          <a:lstStyle/>
+          <a:p>
+            <a:pPr algn="ctr"/>
+          </a:p>
+        </p:txBody>
+      </p:sp>
+      <p:sp>
+        <p:nvSpPr>
+          <p:cNvPr id="24" name="TextBox 23"/>
+          <p:cNvSpPr txBox="1"/>
+          <p:nvPr/>
+        </p:nvSpPr>
+        <p:spPr>
+          <a:xfrm>
+            <a:off x="4552229" y="2633472"/>
+            <a:ext cx="411480" cy="182880"/>
+          </a:xfrm>
+          <a:prstGeom prst="rect">
+            <a:avLst/>
+          </a:prstGeom>
+          <a:noFill/>
+        </p:spPr>
+        <p:txBody>
+          <a:bodyPr wrap="square" lIns="0" rIns="0" tIns="0" bIns="0" anchor="t">
+            <a:spAutoFit/>
+          </a:bodyPr>
+          <a:lstStyle/>
+          <a:p>
+            <a:pPr algn="l"/>
+            <a:r>
+              <a:rPr sz="1000" b="0">
+                <a:solidFill>
+                  <a:srgbClr val="1A1A1A"/>
+                </a:solidFill>
+                <a:latin typeface="Calibri"/>
+              </a:rPr>
+              <a:t>14.0x</a:t>
+            </a:r>
+          </a:p>
+        </p:txBody>
+      </p:sp>
+      <p:sp>
+        <p:nvSpPr>
+          <p:cNvPr id="25" name="TextBox 24"/>
+          <p:cNvSpPr txBox="1"/>
+          <p:nvPr/>
+        </p:nvSpPr>
+        <p:spPr>
+          <a:xfrm>
+            <a:off x="3520440" y="2889503"/>
+            <a:ext cx="502920" cy="182880"/>
+          </a:xfrm>
+          <a:prstGeom prst="rect">
+            <a:avLst/>
+          </a:prstGeom>
+          <a:noFill/>
+        </p:spPr>
+        <p:txBody>
+          <a:bodyPr wrap="square" lIns="0" rIns="0" tIns="0" bIns="0" anchor="t">
+            <a:spAutoFit/>
+          </a:bodyPr>
+          <a:lstStyle/>
+          <a:p>
+            <a:pPr algn="l"/>
+            <a:r>
+              <a:rPr sz="1000" b="0">
+                <a:solidFill>
+                  <a:srgbClr val="1A1A1A"/>
+                </a:solidFill>
+                <a:latin typeface="Calibri"/>
+              </a:rPr>
+              <a:t>FY2024</a:t>
+            </a:r>
+          </a:p>
+        </p:txBody>
+      </p:sp>
+      <p:sp>
+        <p:nvSpPr>
+          <p:cNvPr id="26" name="Rectangle 25"/>
+          <p:cNvSpPr/>
+          <p:nvPr/>
+        </p:nvSpPr>
+        <p:spPr>
+          <a:xfrm>
+            <a:off x="4023360" y="2944368"/>
+            <a:ext cx="513158" cy="73152"/>
+          </a:xfrm>
+          <a:prstGeom prst="rect">
+            <a:avLst/>
+          </a:prstGeom>
+          <a:solidFill>
+            <a:srgbClr val="EFE8DC"/>
+          </a:solidFill>
+          <a:ln>
+            <a:noFill/>
+          </a:ln>
+        </p:spPr>
+        <p:style>
+          <a:lnRef idx="1">
+            <a:schemeClr val="accent1"/>
+          </a:lnRef>
+          <a:fillRef idx="3">
+            <a:schemeClr val="accent1"/>
+          </a:fillRef>
+          <a:effectRef idx="2">
+            <a:schemeClr val="accent1"/>
+          </a:effectRef>
+          <a:fontRef idx="minor">
+            <a:schemeClr val="lt1"/>
+          </a:fontRef>
+        </p:style>
+        <p:txBody>
+          <a:bodyPr rtlCol="0" anchor="ctr"/>
+          <a:lstStyle/>
+          <a:p>
+            <a:pPr algn="ctr"/>
+          </a:p>
+        </p:txBody>
+      </p:sp>
+      <p:sp>
+        <p:nvSpPr>
+          <p:cNvPr id="27" name="Oval 26"/>
+          <p:cNvSpPr/>
+          <p:nvPr/>
+        </p:nvSpPr>
+        <p:spPr>
+          <a:xfrm>
+            <a:off x="4490798" y="2926079"/>
+            <a:ext cx="91440" cy="109728"/>
+          </a:xfrm>
+          <a:prstGeom prst="ellipse">
+            <a:avLst/>
+          </a:prstGeom>
+          <a:solidFill>
+            <a:srgbClr val="7E6849"/>
+          </a:solidFill>
+          <a:ln>
+            <a:noFill/>
+          </a:ln>
+        </p:spPr>
+        <p:style>
+          <a:lnRef idx="1">
+            <a:schemeClr val="accent1"/>
+          </a:lnRef>
+          <a:fillRef idx="3">
+            <a:schemeClr val="accent1"/>
+          </a:fillRef>
+          <a:effectRef idx="2">
+            <a:schemeClr val="accent1"/>
+          </a:effectRef>
+          <a:fontRef idx="minor">
+            <a:schemeClr val="lt1"/>
+          </a:fontRef>
+        </p:style>
+        <p:txBody>
+          <a:bodyPr rtlCol="0" anchor="ctr"/>
+          <a:lstStyle/>
+          <a:p>
+            <a:pPr algn="ctr"/>
+          </a:p>
+        </p:txBody>
+      </p:sp>
+      <p:sp>
+        <p:nvSpPr>
+          <p:cNvPr id="28" name="TextBox 27"/>
+          <p:cNvSpPr txBox="1"/>
+          <p:nvPr/>
+        </p:nvSpPr>
+        <p:spPr>
+          <a:xfrm>
+            <a:off x="4582238" y="2907791"/>
+            <a:ext cx="411480" cy="182880"/>
+          </a:xfrm>
+          <a:prstGeom prst="rect">
+            <a:avLst/>
+          </a:prstGeom>
+          <a:noFill/>
+        </p:spPr>
+        <p:txBody>
+          <a:bodyPr wrap="square" lIns="0" rIns="0" tIns="0" bIns="0" anchor="t">
+            <a:spAutoFit/>
+          </a:bodyPr>
+          <a:lstStyle/>
+          <a:p>
+            <a:pPr algn="l"/>
+            <a:r>
+              <a:rPr sz="1000" b="0">
+                <a:solidFill>
+                  <a:srgbClr val="1A1A1A"/>
+                </a:solidFill>
+                <a:latin typeface="Calibri"/>
+              </a:rPr>
+              <a:t>14.4x</a:t>
+            </a:r>
+          </a:p>
+        </p:txBody>
+      </p:sp>
+      <p:sp>
+        <p:nvSpPr>
+          <p:cNvPr id="29" name="TextBox 28"/>
+          <p:cNvSpPr txBox="1"/>
+          <p:nvPr/>
+        </p:nvSpPr>
+        <p:spPr>
+          <a:xfrm>
+            <a:off x="3520440" y="3163824"/>
+            <a:ext cx="502920" cy="182880"/>
+          </a:xfrm>
+          <a:prstGeom prst="rect">
+            <a:avLst/>
+          </a:prstGeom>
+          <a:noFill/>
+        </p:spPr>
+        <p:txBody>
+          <a:bodyPr wrap="square" lIns="0" rIns="0" tIns="0" bIns="0" anchor="t">
+            <a:spAutoFit/>
+          </a:bodyPr>
+          <a:lstStyle/>
+          <a:p>
+            <a:pPr algn="l"/>
+            <a:r>
+              <a:rPr sz="1000" b="0">
+                <a:solidFill>
+                  <a:srgbClr val="1A1A1A"/>
+                </a:solidFill>
+                <a:latin typeface="Calibri"/>
+              </a:rPr>
+              <a:t>FY2025</a:t>
+            </a:r>
+          </a:p>
+        </p:txBody>
+      </p:sp>
+      <p:sp>
+        <p:nvSpPr>
+          <p:cNvPr id="30" name="Rectangle 29"/>
+          <p:cNvSpPr/>
+          <p:nvPr/>
+        </p:nvSpPr>
+        <p:spPr>
+          <a:xfrm>
+            <a:off x="4023360" y="3218688"/>
+            <a:ext cx="1893584" cy="73152"/>
+          </a:xfrm>
+          <a:prstGeom prst="rect">
+            <a:avLst/>
+          </a:prstGeom>
+          <a:solidFill>
+            <a:srgbClr val="EFE8DC"/>
+          </a:solidFill>
+          <a:ln>
+            <a:noFill/>
+          </a:ln>
+        </p:spPr>
+        <p:style>
+          <a:lnRef idx="1">
+            <a:schemeClr val="accent1"/>
+          </a:lnRef>
+          <a:fillRef idx="3">
+            <a:schemeClr val="accent1"/>
+          </a:fillRef>
+          <a:effectRef idx="2">
+            <a:schemeClr val="accent1"/>
+          </a:effectRef>
+          <a:fontRef idx="minor">
+            <a:schemeClr val="lt1"/>
+          </a:fontRef>
+        </p:style>
+        <p:txBody>
+          <a:bodyPr rtlCol="0" anchor="ctr"/>
+          <a:lstStyle/>
+          <a:p>
+            <a:pPr algn="ctr"/>
+          </a:p>
+        </p:txBody>
+      </p:sp>
+      <p:sp>
+        <p:nvSpPr>
+          <p:cNvPr id="31" name="Oval 30"/>
+          <p:cNvSpPr/>
+          <p:nvPr/>
+        </p:nvSpPr>
+        <p:spPr>
+          <a:xfrm>
+            <a:off x="5871224" y="3200400"/>
+            <a:ext cx="91440" cy="109728"/>
+          </a:xfrm>
+          <a:prstGeom prst="ellipse">
+            <a:avLst/>
+          </a:prstGeom>
+          <a:solidFill>
+            <a:srgbClr val="7E6849"/>
+          </a:solidFill>
+          <a:ln>
+            <a:noFill/>
+          </a:ln>
+        </p:spPr>
+        <p:style>
+          <a:lnRef idx="1">
+            <a:schemeClr val="accent1"/>
+          </a:lnRef>
+          <a:fillRef idx="3">
+            <a:schemeClr val="accent1"/>
+          </a:fillRef>
+          <a:effectRef idx="2">
+            <a:schemeClr val="accent1"/>
+          </a:effectRef>
+          <a:fontRef idx="minor">
+            <a:schemeClr val="lt1"/>
+          </a:fontRef>
+        </p:style>
+        <p:txBody>
+          <a:bodyPr rtlCol="0" anchor="ctr"/>
+          <a:lstStyle/>
+          <a:p>
+            <a:pPr algn="ctr"/>
+          </a:p>
+        </p:txBody>
+      </p:sp>
+      <p:sp>
+        <p:nvSpPr>
+          <p:cNvPr id="32" name="TextBox 31"/>
+          <p:cNvSpPr txBox="1"/>
+          <p:nvPr/>
+        </p:nvSpPr>
+        <p:spPr>
+          <a:xfrm>
+            <a:off x="5962664" y="3182112"/>
+            <a:ext cx="411480" cy="182880"/>
+          </a:xfrm>
+          <a:prstGeom prst="rect">
+            <a:avLst/>
+          </a:prstGeom>
+          <a:noFill/>
+        </p:spPr>
+        <p:txBody>
+          <a:bodyPr wrap="square" lIns="0" rIns="0" tIns="0" bIns="0" anchor="t">
+            <a:spAutoFit/>
+          </a:bodyPr>
+          <a:lstStyle/>
+          <a:p>
+            <a:pPr algn="l"/>
+            <a:r>
+              <a:rPr sz="1000" b="0">
+                <a:solidFill>
+                  <a:srgbClr val="1A1A1A"/>
+                </a:solidFill>
+                <a:latin typeface="Calibri"/>
+              </a:rPr>
+              <a:t>32.8x</a:t>
+            </a:r>
+          </a:p>
+        </p:txBody>
+      </p:sp>
+      <p:sp>
+        <p:nvSpPr>
+          <p:cNvPr id="33" name="TextBox 32"/>
+          <p:cNvSpPr txBox="1"/>
+          <p:nvPr/>
+        </p:nvSpPr>
+        <p:spPr>
+          <a:xfrm>
+            <a:off x="3520440" y="3438144"/>
+            <a:ext cx="502920" cy="182880"/>
+          </a:xfrm>
+          <a:prstGeom prst="rect">
+            <a:avLst/>
+          </a:prstGeom>
+          <a:noFill/>
+        </p:spPr>
+        <p:txBody>
+          <a:bodyPr wrap="square" lIns="0" rIns="0" tIns="0" bIns="0" anchor="t">
+            <a:spAutoFit/>
+          </a:bodyPr>
+          <a:lstStyle/>
+          <a:p>
+            <a:pPr algn="l"/>
+            <a:r>
+              <a:rPr sz="1000" b="0">
+                <a:solidFill>
+                  <a:srgbClr val="1A1A1A"/>
+                </a:solidFill>
+                <a:latin typeface="Calibri"/>
+              </a:rPr>
+              <a:t>FY2026</a:t>
+            </a:r>
+          </a:p>
+        </p:txBody>
+      </p:sp>
+      <p:sp>
+        <p:nvSpPr>
+          <p:cNvPr id="34" name="Rectangle 33"/>
+          <p:cNvSpPr/>
+          <p:nvPr/>
+        </p:nvSpPr>
+        <p:spPr>
+          <a:xfrm>
+            <a:off x="4023360" y="3493008"/>
+            <a:ext cx="1953603" cy="73152"/>
+          </a:xfrm>
+          <a:prstGeom prst="rect">
+            <a:avLst/>
+          </a:prstGeom>
+          <a:solidFill>
+            <a:srgbClr val="EFE8DC"/>
+          </a:solidFill>
+          <a:ln>
+            <a:noFill/>
+          </a:ln>
+        </p:spPr>
+        <p:style>
+          <a:lnRef idx="1">
+            <a:schemeClr val="accent1"/>
+          </a:lnRef>
+          <a:fillRef idx="3">
+            <a:schemeClr val="accent1"/>
+          </a:fillRef>
+          <a:effectRef idx="2">
+            <a:schemeClr val="accent1"/>
+          </a:effectRef>
+          <a:fontRef idx="minor">
+            <a:schemeClr val="lt1"/>
+          </a:fontRef>
+        </p:style>
+        <p:txBody>
+          <a:bodyPr rtlCol="0" anchor="ctr"/>
+          <a:lstStyle/>
+          <a:p>
+            <a:pPr algn="ctr"/>
+          </a:p>
+        </p:txBody>
+      </p:sp>
+      <p:sp>
+        <p:nvSpPr>
+          <p:cNvPr id="35" name="Oval 34"/>
+          <p:cNvSpPr/>
+          <p:nvPr/>
+        </p:nvSpPr>
+        <p:spPr>
+          <a:xfrm>
+            <a:off x="5931243" y="3474720"/>
+            <a:ext cx="91440" cy="109728"/>
+          </a:xfrm>
+          <a:prstGeom prst="ellipse">
+            <a:avLst/>
+          </a:prstGeom>
+          <a:solidFill>
+            <a:srgbClr val="7E6849"/>
+          </a:solidFill>
+          <a:ln>
+            <a:noFill/>
+          </a:ln>
+        </p:spPr>
+        <p:style>
+          <a:lnRef idx="1">
+            <a:schemeClr val="accent1"/>
+          </a:lnRef>
+          <a:fillRef idx="3">
+            <a:schemeClr val="accent1"/>
+          </a:fillRef>
+          <a:effectRef idx="2">
+            <a:schemeClr val="accent1"/>
+          </a:effectRef>
+          <a:fontRef idx="minor">
+            <a:schemeClr val="lt1"/>
+          </a:fontRef>
+        </p:style>
+        <p:txBody>
+          <a:bodyPr rtlCol="0" anchor="ctr"/>
+          <a:lstStyle/>
+          <a:p>
+            <a:pPr algn="ctr"/>
+          </a:p>
+        </p:txBody>
+      </p:sp>
+      <p:sp>
+        <p:nvSpPr>
+          <p:cNvPr id="36" name="TextBox 35"/>
+          <p:cNvSpPr txBox="1"/>
+          <p:nvPr/>
+        </p:nvSpPr>
+        <p:spPr>
+          <a:xfrm>
+            <a:off x="6022683" y="3456432"/>
+            <a:ext cx="411480" cy="182880"/>
+          </a:xfrm>
+          <a:prstGeom prst="rect">
+            <a:avLst/>
+          </a:prstGeom>
+          <a:noFill/>
+        </p:spPr>
+        <p:txBody>
+          <a:bodyPr wrap="square" lIns="0" rIns="0" tIns="0" bIns="0" anchor="t">
+            <a:spAutoFit/>
+          </a:bodyPr>
+          <a:lstStyle/>
+          <a:p>
+            <a:pPr algn="l"/>
+            <a:r>
+              <a:rPr sz="1000" b="0">
+                <a:solidFill>
+                  <a:srgbClr val="1A1A1A"/>
+                </a:solidFill>
+                <a:latin typeface="Calibri"/>
+              </a:rPr>
+              <a:t>33.6x</a:t>
+            </a:r>
+          </a:p>
+        </p:txBody>
+      </p:sp>
+      <p:sp>
+        <p:nvSpPr>
+          <p:cNvPr id="37" name="TextBox 36"/>
+          <p:cNvSpPr txBox="1"/>
+          <p:nvPr/>
+        </p:nvSpPr>
+        <p:spPr>
+          <a:xfrm>
+            <a:off x="3520440" y="3712463"/>
+            <a:ext cx="502920" cy="182880"/>
+          </a:xfrm>
+          <a:prstGeom prst="rect">
+            <a:avLst/>
+          </a:prstGeom>
+          <a:noFill/>
+        </p:spPr>
+        <p:txBody>
+          <a:bodyPr wrap="square" lIns="0" rIns="0" tIns="0" bIns="0" anchor="t">
+            <a:spAutoFit/>
+          </a:bodyPr>
+          <a:lstStyle/>
+          <a:p>
+            <a:pPr algn="l"/>
+            <a:r>
+              <a:rPr sz="1000" b="0">
+                <a:solidFill>
+                  <a:srgbClr val="1A1A1A"/>
+                </a:solidFill>
+                <a:latin typeface="Calibri"/>
+              </a:rPr>
+              <a:t>FY2027</a:t>
+            </a:r>
+          </a:p>
+        </p:txBody>
+      </p:sp>
+      <p:sp>
+        <p:nvSpPr>
+          <p:cNvPr id="38" name="Rectangle 37"/>
+          <p:cNvSpPr/>
+          <p:nvPr/>
+        </p:nvSpPr>
+        <p:spPr>
+          <a:xfrm>
+            <a:off x="4023360" y="3767327"/>
+            <a:ext cx="745730" cy="73152"/>
+          </a:xfrm>
+          <a:prstGeom prst="rect">
+            <a:avLst/>
+          </a:prstGeom>
+          <a:solidFill>
+            <a:srgbClr val="EFE8DC"/>
+          </a:solidFill>
+          <a:ln>
+            <a:noFill/>
+          </a:ln>
+        </p:spPr>
+        <p:style>
+          <a:lnRef idx="1">
+            <a:schemeClr val="accent1"/>
+          </a:lnRef>
+          <a:fillRef idx="3">
+            <a:schemeClr val="accent1"/>
+          </a:fillRef>
+          <a:effectRef idx="2">
+            <a:schemeClr val="accent1"/>
+          </a:effectRef>
+          <a:fontRef idx="minor">
+            <a:schemeClr val="lt1"/>
+          </a:fontRef>
+        </p:style>
+        <p:txBody>
+          <a:bodyPr rtlCol="0" anchor="ctr"/>
+          <a:lstStyle/>
+          <a:p>
+            <a:pPr algn="ctr"/>
+          </a:p>
+        </p:txBody>
+      </p:sp>
+      <p:sp>
+        <p:nvSpPr>
+          <p:cNvPr id="39" name="Oval 38"/>
+          <p:cNvSpPr/>
+          <p:nvPr/>
+        </p:nvSpPr>
+        <p:spPr>
+          <a:xfrm>
+            <a:off x="4723370" y="3749039"/>
+            <a:ext cx="91440" cy="109728"/>
+          </a:xfrm>
+          <a:prstGeom prst="ellipse">
+            <a:avLst/>
+          </a:prstGeom>
+          <a:solidFill>
+            <a:srgbClr val="7E6849"/>
+          </a:solidFill>
+          <a:ln>
+            <a:noFill/>
+          </a:ln>
+        </p:spPr>
+        <p:style>
+          <a:lnRef idx="1">
+            <a:schemeClr val="accent1"/>
+          </a:lnRef>
+          <a:fillRef idx="3">
+            <a:schemeClr val="accent1"/>
+          </a:fillRef>
+          <a:effectRef idx="2">
+            <a:schemeClr val="accent1"/>
+          </a:effectRef>
+          <a:fontRef idx="minor">
+            <a:schemeClr val="lt1"/>
+          </a:fontRef>
+        </p:style>
+        <p:txBody>
+          <a:bodyPr rtlCol="0" anchor="ctr"/>
+          <a:lstStyle/>
+          <a:p>
+            <a:pPr algn="ctr"/>
+          </a:p>
+        </p:txBody>
+      </p:sp>
+      <p:sp>
+        <p:nvSpPr>
+          <p:cNvPr id="40" name="TextBox 39"/>
+          <p:cNvSpPr txBox="1"/>
+          <p:nvPr/>
+        </p:nvSpPr>
+        <p:spPr>
+          <a:xfrm>
+            <a:off x="4814810" y="3730751"/>
+            <a:ext cx="411480" cy="182880"/>
+          </a:xfrm>
+          <a:prstGeom prst="rect">
+            <a:avLst/>
+          </a:prstGeom>
+          <a:noFill/>
+        </p:spPr>
+        <p:txBody>
+          <a:bodyPr wrap="square" lIns="0" rIns="0" tIns="0" bIns="0" anchor="t">
+            <a:spAutoFit/>
+          </a:bodyPr>
+          <a:lstStyle/>
+          <a:p>
+            <a:pPr algn="l"/>
+            <a:r>
+              <a:rPr sz="1000" b="0">
+                <a:solidFill>
+                  <a:srgbClr val="1A1A1A"/>
+                </a:solidFill>
+                <a:latin typeface="Calibri"/>
+              </a:rPr>
+              <a:t>17.5x</a:t>
+            </a:r>
+          </a:p>
+        </p:txBody>
+      </p:sp>
+      <p:sp>
+        <p:nvSpPr>
+          <p:cNvPr id="41" name="TextBox 40"/>
+          <p:cNvSpPr txBox="1"/>
+          <p:nvPr/>
+        </p:nvSpPr>
+        <p:spPr>
+          <a:xfrm>
+            <a:off x="3520440" y="3986783"/>
+            <a:ext cx="502920" cy="182880"/>
+          </a:xfrm>
+          <a:prstGeom prst="rect">
+            <a:avLst/>
+          </a:prstGeom>
+          <a:noFill/>
+        </p:spPr>
+        <p:txBody>
+          <a:bodyPr wrap="square" lIns="0" rIns="0" tIns="0" bIns="0" anchor="t">
+            <a:spAutoFit/>
+          </a:bodyPr>
+          <a:lstStyle/>
+          <a:p>
+            <a:pPr algn="l"/>
+            <a:r>
+              <a:rPr sz="1000" b="0">
+                <a:solidFill>
+                  <a:srgbClr val="1A1A1A"/>
+                </a:solidFill>
+                <a:latin typeface="Calibri"/>
+              </a:rPr>
+              <a:t>FY2028</a:t>
+            </a:r>
+          </a:p>
+        </p:txBody>
+      </p:sp>
+      <p:sp>
+        <p:nvSpPr>
+          <p:cNvPr id="42" name="Rectangle 41"/>
+          <p:cNvSpPr/>
+          <p:nvPr/>
+        </p:nvSpPr>
+        <p:spPr>
+          <a:xfrm>
+            <a:off x="4023360" y="4041647"/>
+            <a:ext cx="363112" cy="73152"/>
+          </a:xfrm>
+          <a:prstGeom prst="rect">
+            <a:avLst/>
+          </a:prstGeom>
+          <a:solidFill>
+            <a:srgbClr val="EFE8DC"/>
+          </a:solidFill>
+          <a:ln>
+            <a:noFill/>
+          </a:ln>
+        </p:spPr>
+        <p:style>
+          <a:lnRef idx="1">
+            <a:schemeClr val="accent1"/>
+          </a:lnRef>
+          <a:fillRef idx="3">
+            <a:schemeClr val="accent1"/>
+          </a:fillRef>
+          <a:effectRef idx="2">
+            <a:schemeClr val="accent1"/>
+          </a:effectRef>
+          <a:fontRef idx="minor">
+            <a:schemeClr val="lt1"/>
+          </a:fontRef>
+        </p:style>
+        <p:txBody>
+          <a:bodyPr rtlCol="0" anchor="ctr"/>
+          <a:lstStyle/>
+          <a:p>
+            <a:pPr algn="ctr"/>
+          </a:p>
+        </p:txBody>
+      </p:sp>
+      <p:sp>
+        <p:nvSpPr>
+          <p:cNvPr id="43" name="Oval 42"/>
+          <p:cNvSpPr/>
+          <p:nvPr/>
+        </p:nvSpPr>
+        <p:spPr>
+          <a:xfrm>
+            <a:off x="4340752" y="4023359"/>
+            <a:ext cx="91440" cy="109728"/>
+          </a:xfrm>
+          <a:prstGeom prst="ellipse">
+            <a:avLst/>
+          </a:prstGeom>
+          <a:solidFill>
+            <a:srgbClr val="7E6849"/>
+          </a:solidFill>
+          <a:ln>
+            <a:noFill/>
+          </a:ln>
+        </p:spPr>
+        <p:style>
+          <a:lnRef idx="1">
+            <a:schemeClr val="accent1"/>
+          </a:lnRef>
+          <a:fillRef idx="3">
+            <a:schemeClr val="accent1"/>
+          </a:fillRef>
+          <a:effectRef idx="2">
+            <a:schemeClr val="accent1"/>
+          </a:effectRef>
+          <a:fontRef idx="minor">
+            <a:schemeClr val="lt1"/>
+          </a:fontRef>
+        </p:style>
+        <p:txBody>
+          <a:bodyPr rtlCol="0" anchor="ctr"/>
+          <a:lstStyle/>
+          <a:p>
+            <a:pPr algn="ctr"/>
+          </a:p>
+        </p:txBody>
+      </p:sp>
+      <p:sp>
+        <p:nvSpPr>
+          <p:cNvPr id="44" name="TextBox 43"/>
+          <p:cNvSpPr txBox="1"/>
+          <p:nvPr/>
+        </p:nvSpPr>
+        <p:spPr>
+          <a:xfrm>
+            <a:off x="4432192" y="4005071"/>
+            <a:ext cx="411480" cy="182880"/>
+          </a:xfrm>
+          <a:prstGeom prst="rect">
+            <a:avLst/>
+          </a:prstGeom>
+          <a:noFill/>
+        </p:spPr>
+        <p:txBody>
+          <a:bodyPr wrap="square" lIns="0" rIns="0" tIns="0" bIns="0" anchor="t">
+            <a:spAutoFit/>
+          </a:bodyPr>
+          <a:lstStyle/>
+          <a:p>
+            <a:pPr algn="l"/>
+            <a:r>
+              <a:rPr sz="1000" b="0">
+                <a:solidFill>
+                  <a:srgbClr val="1A1A1A"/>
+                </a:solidFill>
+                <a:latin typeface="Calibri"/>
+              </a:rPr>
+              <a:t>12.4x</a:t>
+            </a:r>
+          </a:p>
+        </p:txBody>
+      </p:sp>
+      <p:sp>
+        <p:nvSpPr>
+          <p:cNvPr id="45" name="TextBox 44"/>
+          <p:cNvSpPr txBox="1"/>
+          <p:nvPr/>
+        </p:nvSpPr>
+        <p:spPr>
+          <a:xfrm>
+            <a:off x="3886200" y="4297680"/>
+            <a:ext cx="365760" cy="164592"/>
+          </a:xfrm>
+          <a:prstGeom prst="rect">
+            <a:avLst/>
+          </a:prstGeom>
+          <a:noFill/>
+        </p:spPr>
+        <p:txBody>
+          <a:bodyPr wrap="square" lIns="0" rIns="0" tIns="0" bIns="0" anchor="t">
+            <a:spAutoFit/>
+          </a:bodyPr>
+          <a:lstStyle/>
+          <a:p>
+            <a:pPr algn="l"/>
+            <a:r>
+              <a:rPr sz="700" b="0">
+                <a:solidFill>
                   <a:srgbClr val="9A9A9A"/>
                 </a:solidFill>
                 <a:latin typeface="Calibri"/>
               </a:rPr>
-              <a:t>No P/E history available</a:t>
-            </a:r>
-          </a:p>
-        </p:txBody>
-      </p:sp>
-      <p:sp>
-        <p:nvSpPr>
-          <p:cNvPr id="14" name="Rectangle 13"/>
+              <a:t>8x</a:t>
+            </a:r>
+          </a:p>
+        </p:txBody>
+      </p:sp>
+      <p:sp>
+        <p:nvSpPr>
+          <p:cNvPr id="46" name="TextBox 45"/>
+          <p:cNvSpPr txBox="1"/>
+          <p:nvPr/>
+        </p:nvSpPr>
+        <p:spPr>
+          <a:xfrm>
+            <a:off x="4663440" y="4297680"/>
+            <a:ext cx="365760" cy="164592"/>
+          </a:xfrm>
+          <a:prstGeom prst="rect">
+            <a:avLst/>
+          </a:prstGeom>
+          <a:noFill/>
+        </p:spPr>
+        <p:txBody>
+          <a:bodyPr wrap="square" lIns="0" rIns="0" tIns="0" bIns="0" anchor="t">
+            <a:spAutoFit/>
+          </a:bodyPr>
+          <a:lstStyle/>
+          <a:p>
+            <a:pPr algn="l"/>
+            <a:r>
+              <a:rPr sz="700" b="0">
+                <a:solidFill>
+                  <a:srgbClr val="9A9A9A"/>
+                </a:solidFill>
+                <a:latin typeface="Calibri"/>
+              </a:rPr>
+              <a:t>18x</a:t>
+            </a:r>
+          </a:p>
+        </p:txBody>
+      </p:sp>
+      <p:sp>
+        <p:nvSpPr>
+          <p:cNvPr id="47" name="TextBox 46"/>
+          <p:cNvSpPr txBox="1"/>
+          <p:nvPr/>
+        </p:nvSpPr>
+        <p:spPr>
+          <a:xfrm>
+            <a:off x="5440679" y="4297680"/>
+            <a:ext cx="365760" cy="164592"/>
+          </a:xfrm>
+          <a:prstGeom prst="rect">
+            <a:avLst/>
+          </a:prstGeom>
+          <a:noFill/>
+        </p:spPr>
+        <p:txBody>
+          <a:bodyPr wrap="square" lIns="0" rIns="0" tIns="0" bIns="0" anchor="t">
+            <a:spAutoFit/>
+          </a:bodyPr>
+          <a:lstStyle/>
+          <a:p>
+            <a:pPr algn="l"/>
+            <a:r>
+              <a:rPr sz="700" b="0">
+                <a:solidFill>
+                  <a:srgbClr val="9A9A9A"/>
+                </a:solidFill>
+                <a:latin typeface="Calibri"/>
+              </a:rPr>
+              <a:t>28x</a:t>
+            </a:r>
+          </a:p>
+        </p:txBody>
+      </p:sp>
+      <p:sp>
+        <p:nvSpPr>
+          <p:cNvPr id="48" name="TextBox 47"/>
+          <p:cNvSpPr txBox="1"/>
+          <p:nvPr/>
+        </p:nvSpPr>
+        <p:spPr>
+          <a:xfrm>
+            <a:off x="6217920" y="4297680"/>
+            <a:ext cx="365760" cy="164592"/>
+          </a:xfrm>
+          <a:prstGeom prst="rect">
+            <a:avLst/>
+          </a:prstGeom>
+          <a:noFill/>
+        </p:spPr>
+        <p:txBody>
+          <a:bodyPr wrap="square" lIns="0" rIns="0" tIns="0" bIns="0" anchor="t">
+            <a:spAutoFit/>
+          </a:bodyPr>
+          <a:lstStyle/>
+          <a:p>
+            <a:pPr algn="l"/>
+            <a:r>
+              <a:rPr sz="700" b="0">
+                <a:solidFill>
+                  <a:srgbClr val="9A9A9A"/>
+                </a:solidFill>
+                <a:latin typeface="Calibri"/>
+              </a:rPr>
+              <a:t>39x</a:t>
+            </a:r>
+          </a:p>
+        </p:txBody>
+      </p:sp>
+      <p:sp>
+        <p:nvSpPr>
+          <p:cNvPr id="49" name="Diamond 48"/>
+          <p:cNvSpPr/>
+          <p:nvPr/>
+        </p:nvSpPr>
+        <p:spPr>
+          <a:xfrm>
+            <a:off x="4313320" y="4242816"/>
+            <a:ext cx="146304" cy="146304"/>
+          </a:xfrm>
+          <a:prstGeom prst="diamond">
+            <a:avLst/>
+          </a:prstGeom>
+          <a:solidFill>
+            <a:srgbClr val="1A1A1A"/>
+          </a:solidFill>
+          <a:ln>
+            <a:noFill/>
+          </a:ln>
+        </p:spPr>
+        <p:style>
+          <a:lnRef idx="1">
+            <a:schemeClr val="accent1"/>
+          </a:lnRef>
+          <a:fillRef idx="3">
+            <a:schemeClr val="accent1"/>
+          </a:fillRef>
+          <a:effectRef idx="2">
+            <a:schemeClr val="accent1"/>
+          </a:effectRef>
+          <a:fontRef idx="minor">
+            <a:schemeClr val="lt1"/>
+          </a:fontRef>
+        </p:style>
+        <p:txBody>
+          <a:bodyPr rtlCol="0" anchor="ctr"/>
+          <a:lstStyle/>
+          <a:p>
+            <a:pPr algn="ctr"/>
+          </a:p>
+        </p:txBody>
+      </p:sp>
+      <p:sp>
+        <p:nvSpPr>
+          <p:cNvPr id="50" name="TextBox 49"/>
+          <p:cNvSpPr txBox="1"/>
+          <p:nvPr/>
+        </p:nvSpPr>
+        <p:spPr>
+          <a:xfrm>
+            <a:off x="4477912" y="4224528"/>
+            <a:ext cx="1280160" cy="164592"/>
+          </a:xfrm>
+          <a:prstGeom prst="rect">
+            <a:avLst/>
+          </a:prstGeom>
+          <a:noFill/>
+        </p:spPr>
+        <p:txBody>
+          <a:bodyPr wrap="square" lIns="0" rIns="0" tIns="0" bIns="0" anchor="t">
+            <a:spAutoFit/>
+          </a:bodyPr>
+          <a:lstStyle/>
+          <a:p>
+            <a:pPr algn="l"/>
+            <a:r>
+              <a:rPr sz="700" b="0">
+                <a:solidFill>
+                  <a:srgbClr val="1A1A1A"/>
+                </a:solidFill>
+                <a:latin typeface="Calibri"/>
+              </a:rPr>
+              <a:t>Current  (12.4x)</a:t>
+            </a:r>
+          </a:p>
+        </p:txBody>
+      </p:sp>
+      <p:sp>
+        <p:nvSpPr>
+          <p:cNvPr id="51" name="Rectangle 50"/>
           <p:cNvSpPr/>
           <p:nvPr/>
         </p:nvSpPr>
@@ -9575,7 +11434,7 @@
       </p:sp>
       <p:sp>
         <p:nvSpPr>
-          <p:cNvPr id="15" name="TextBox 14"/>
+          <p:cNvPr id="52" name="TextBox 51"/>
           <p:cNvSpPr txBox="1"/>
           <p:nvPr/>
         </p:nvSpPr>
@@ -9610,7 +11469,7 @@
       </p:sp>
       <p:sp>
         <p:nvSpPr>
-          <p:cNvPr id="16" name="TextBox 15"/>
+          <p:cNvPr id="53" name="TextBox 52"/>
           <p:cNvSpPr txBox="1"/>
           <p:nvPr/>
         </p:nvSpPr>
@@ -9645,7 +11504,7 @@
       </p:sp>
       <p:sp>
         <p:nvSpPr>
-          <p:cNvPr id="17" name="TextBox 16"/>
+          <p:cNvPr id="54" name="TextBox 53"/>
           <p:cNvSpPr txBox="1"/>
           <p:nvPr/>
         </p:nvSpPr>
@@ -9680,7 +11539,7 @@
       </p:sp>
       <p:sp>
         <p:nvSpPr>
-          <p:cNvPr id="18" name="TextBox 17"/>
+          <p:cNvPr id="55" name="TextBox 54"/>
           <p:cNvSpPr txBox="1"/>
           <p:nvPr/>
         </p:nvSpPr>
@@ -9715,7 +11574,7 @@
       </p:sp>
       <p:sp>
         <p:nvSpPr>
-          <p:cNvPr id="19" name="TextBox 18"/>
+          <p:cNvPr id="56" name="TextBox 55"/>
           <p:cNvSpPr txBox="1"/>
           <p:nvPr/>
         </p:nvSpPr>
@@ -9750,7 +11609,7 @@
       </p:sp>
       <p:sp>
         <p:nvSpPr>
-          <p:cNvPr id="20" name="TextBox 19"/>
+          <p:cNvPr id="57" name="TextBox 56"/>
           <p:cNvSpPr txBox="1"/>
           <p:nvPr/>
         </p:nvSpPr>
@@ -9785,7 +11644,7 @@
       </p:sp>
       <p:sp>
         <p:nvSpPr>
-          <p:cNvPr id="21" name="TextBox 20"/>
+          <p:cNvPr id="58" name="TextBox 57"/>
           <p:cNvSpPr txBox="1"/>
           <p:nvPr/>
         </p:nvSpPr>
@@ -9820,7 +11679,7 @@
       </p:sp>
       <p:sp>
         <p:nvSpPr>
-          <p:cNvPr id="22" name="Rectangle 21"/>
+          <p:cNvPr id="59" name="Rectangle 58"/>
           <p:cNvSpPr/>
           <p:nvPr/>
         </p:nvSpPr>
@@ -9864,7 +11723,217 @@
       </p:sp>
       <p:sp>
         <p:nvSpPr>
-          <p:cNvPr id="23" name="Rectangle 22"/>
+          <p:cNvPr id="60" name="TextBox 59"/>
+          <p:cNvSpPr txBox="1"/>
+          <p:nvPr/>
+        </p:nvSpPr>
+        <p:spPr>
+          <a:xfrm>
+            <a:off x="411480" y="5093208"/>
+            <a:ext cx="1874520" cy="256032"/>
+          </a:xfrm>
+          <a:prstGeom prst="rect">
+            <a:avLst/>
+          </a:prstGeom>
+          <a:noFill/>
+        </p:spPr>
+        <p:txBody>
+          <a:bodyPr wrap="square" lIns="0" rIns="0" tIns="0" bIns="0" anchor="t">
+            <a:spAutoFit/>
+          </a:bodyPr>
+          <a:lstStyle/>
+          <a:p>
+            <a:pPr algn="l"/>
+            <a:r>
+              <a:rPr sz="1000" b="0">
+                <a:solidFill>
+                  <a:srgbClr val="1A1A1A"/>
+                </a:solidFill>
+                <a:latin typeface="Calibri"/>
+              </a:rPr>
+              <a:t>iShares MSCI India ETF</a:t>
+            </a:r>
+          </a:p>
+        </p:txBody>
+      </p:sp>
+      <p:sp>
+        <p:nvSpPr>
+          <p:cNvPr id="61" name="TextBox 60"/>
+          <p:cNvSpPr txBox="1"/>
+          <p:nvPr/>
+        </p:nvSpPr>
+        <p:spPr>
+          <a:xfrm>
+            <a:off x="2331720" y="5093208"/>
+            <a:ext cx="960120" cy="256032"/>
+          </a:xfrm>
+          <a:prstGeom prst="rect">
+            <a:avLst/>
+          </a:prstGeom>
+          <a:noFill/>
+        </p:spPr>
+        <p:txBody>
+          <a:bodyPr wrap="square" lIns="0" rIns="0" tIns="0" bIns="0" anchor="t">
+            <a:spAutoFit/>
+          </a:bodyPr>
+          <a:lstStyle/>
+          <a:p>
+            <a:pPr algn="l"/>
+            <a:r>
+              <a:rPr sz="1000" b="0">
+                <a:solidFill>
+                  <a:srgbClr val="1A1A1A"/>
+                </a:solidFill>
+                <a:latin typeface="Calibri"/>
+              </a:rPr>
+              <a:t>INDA</a:t>
+            </a:r>
+          </a:p>
+        </p:txBody>
+      </p:sp>
+      <p:sp>
+        <p:nvSpPr>
+          <p:cNvPr id="62" name="TextBox 61"/>
+          <p:cNvSpPr txBox="1"/>
+          <p:nvPr/>
+        </p:nvSpPr>
+        <p:spPr>
+          <a:xfrm>
+            <a:off x="3337560" y="5093208"/>
+            <a:ext cx="960120" cy="256032"/>
+          </a:xfrm>
+          <a:prstGeom prst="rect">
+            <a:avLst/>
+          </a:prstGeom>
+          <a:noFill/>
+        </p:spPr>
+        <p:txBody>
+          <a:bodyPr wrap="square" lIns="0" rIns="0" tIns="0" bIns="0" anchor="t">
+            <a:spAutoFit/>
+          </a:bodyPr>
+          <a:lstStyle/>
+          <a:p>
+            <a:pPr algn="r"/>
+            <a:r>
+              <a:rPr sz="1000" b="0">
+                <a:solidFill>
+                  <a:srgbClr val="1A1A1A"/>
+                </a:solidFill>
+                <a:latin typeface="Calibri"/>
+              </a:rPr>
+              <a:t>—</a:t>
+            </a:r>
+          </a:p>
+        </p:txBody>
+      </p:sp>
+      <p:sp>
+        <p:nvSpPr>
+          <p:cNvPr id="63" name="TextBox 62"/>
+          <p:cNvSpPr txBox="1"/>
+          <p:nvPr/>
+        </p:nvSpPr>
+        <p:spPr>
+          <a:xfrm>
+            <a:off x="4343400" y="5093208"/>
+            <a:ext cx="594359" cy="256032"/>
+          </a:xfrm>
+          <a:prstGeom prst="rect">
+            <a:avLst/>
+          </a:prstGeom>
+          <a:noFill/>
+        </p:spPr>
+        <p:txBody>
+          <a:bodyPr wrap="square" lIns="0" rIns="0" tIns="0" bIns="0" anchor="t">
+            <a:spAutoFit/>
+          </a:bodyPr>
+          <a:lstStyle/>
+          <a:p>
+            <a:pPr algn="r"/>
+            <a:r>
+              <a:rPr sz="1000" b="0">
+                <a:solidFill>
+                  <a:srgbClr val="1A1A1A"/>
+                </a:solidFill>
+                <a:latin typeface="Calibri"/>
+              </a:rPr>
+              <a:t>—</a:t>
+            </a:r>
+          </a:p>
+        </p:txBody>
+      </p:sp>
+      <p:sp>
+        <p:nvSpPr>
+          <p:cNvPr id="64" name="TextBox 63"/>
+          <p:cNvSpPr txBox="1"/>
+          <p:nvPr/>
+        </p:nvSpPr>
+        <p:spPr>
+          <a:xfrm>
+            <a:off x="4983480" y="5093208"/>
+            <a:ext cx="685800" cy="256032"/>
+          </a:xfrm>
+          <a:prstGeom prst="rect">
+            <a:avLst/>
+          </a:prstGeom>
+          <a:noFill/>
+        </p:spPr>
+        <p:txBody>
+          <a:bodyPr wrap="square" lIns="0" rIns="0" tIns="0" bIns="0" anchor="t">
+            <a:spAutoFit/>
+          </a:bodyPr>
+          <a:lstStyle/>
+          <a:p>
+            <a:pPr algn="r"/>
+            <a:r>
+              <a:rPr sz="1000" b="0">
+                <a:solidFill>
+                  <a:srgbClr val="1A1A1A"/>
+                </a:solidFill>
+                <a:latin typeface="Calibri"/>
+              </a:rPr>
+              <a:t>—</a:t>
+            </a:r>
+          </a:p>
+        </p:txBody>
+      </p:sp>
+      <p:sp>
+        <p:nvSpPr>
+          <p:cNvPr id="65" name="TextBox 64"/>
+          <p:cNvSpPr txBox="1"/>
+          <p:nvPr/>
+        </p:nvSpPr>
+        <p:spPr>
+          <a:xfrm>
+            <a:off x="5715000" y="5093208"/>
+            <a:ext cx="685800" cy="256032"/>
+          </a:xfrm>
+          <a:prstGeom prst="rect">
+            <a:avLst/>
+          </a:prstGeom>
+          <a:noFill/>
+        </p:spPr>
+        <p:txBody>
+          <a:bodyPr wrap="square" lIns="0" rIns="0" tIns="0" bIns="0" anchor="t">
+            <a:spAutoFit/>
+          </a:bodyPr>
+          <a:lstStyle/>
+          <a:p>
+            <a:pPr algn="r"/>
+            <a:r>
+              <a:rPr sz="1000" b="0">
+                <a:solidFill>
+                  <a:srgbClr val="1A1A1A"/>
+                </a:solidFill>
+                <a:latin typeface="Calibri"/>
+              </a:rPr>
+              <a:t>—</a:t>
+            </a:r>
+          </a:p>
+        </p:txBody>
+      </p:sp>
+      <p:sp>
+        <p:nvSpPr>
+          <p:cNvPr id="66" name="Rectangle 65"/>
           <p:cNvSpPr/>
           <p:nvPr/>
         </p:nvSpPr>
@@ -9908,7 +11977,7 @@
       </p:sp>
       <p:sp>
         <p:nvSpPr>
-          <p:cNvPr id="24" name="TextBox 23"/>
+          <p:cNvPr id="67" name="TextBox 66"/>
           <p:cNvSpPr txBox="1"/>
           <p:nvPr/>
         </p:nvSpPr>
@@ -9943,7 +12012,7 @@
       </p:sp>
       <p:sp>
         <p:nvSpPr>
-          <p:cNvPr id="25" name="Rectangle 24"/>
+          <p:cNvPr id="68" name="Rectangle 67"/>
           <p:cNvSpPr/>
           <p:nvPr/>
         </p:nvSpPr>
@@ -9989,7 +12058,7 @@
       </p:sp>
       <p:sp>
         <p:nvSpPr>
-          <p:cNvPr id="26" name="Rectangle 25"/>
+          <p:cNvPr id="69" name="Rectangle 68"/>
           <p:cNvSpPr/>
           <p:nvPr/>
         </p:nvSpPr>
@@ -10033,7 +12102,7 @@
       </p:sp>
       <p:sp>
         <p:nvSpPr>
-          <p:cNvPr id="27" name="TextBox 26"/>
+          <p:cNvPr id="70" name="TextBox 69"/>
           <p:cNvSpPr txBox="1"/>
           <p:nvPr/>
         </p:nvSpPr>
@@ -10068,7 +12137,7 @@
       </p:sp>
       <p:sp>
         <p:nvSpPr>
-          <p:cNvPr id="28" name="Rectangle 27"/>
+          <p:cNvPr id="71" name="Rectangle 70"/>
           <p:cNvSpPr/>
           <p:nvPr/>
         </p:nvSpPr>
@@ -10111,7 +12180,7 @@
       </p:sp>
       <p:sp>
         <p:nvSpPr>
-          <p:cNvPr id="29" name="Rectangle 28"/>
+          <p:cNvPr id="72" name="Rectangle 71"/>
           <p:cNvSpPr/>
           <p:nvPr/>
         </p:nvSpPr>
@@ -10154,7 +12223,7 @@
       </p:sp>
       <p:sp>
         <p:nvSpPr>
-          <p:cNvPr id="30" name="Rectangle 29"/>
+          <p:cNvPr id="73" name="Rectangle 72"/>
           <p:cNvSpPr/>
           <p:nvPr/>
         </p:nvSpPr>
@@ -10197,7 +12266,7 @@
       </p:sp>
       <p:sp>
         <p:nvSpPr>
-          <p:cNvPr id="31" name="TextBox 30"/>
+          <p:cNvPr id="74" name="TextBox 73"/>
           <p:cNvSpPr txBox="1"/>
           <p:nvPr/>
         </p:nvSpPr>
@@ -10232,7 +12301,7 @@
       </p:sp>
       <p:sp>
         <p:nvSpPr>
-          <p:cNvPr id="32" name="TextBox 31"/>
+          <p:cNvPr id="75" name="TextBox 74"/>
           <p:cNvSpPr txBox="1"/>
           <p:nvPr/>
         </p:nvSpPr>
@@ -10267,7 +12336,7 @@
       </p:sp>
       <p:sp>
         <p:nvSpPr>
-          <p:cNvPr id="33" name="Rectangle 32"/>
+          <p:cNvPr id="76" name="Rectangle 75"/>
           <p:cNvSpPr/>
           <p:nvPr/>
         </p:nvSpPr>
@@ -10313,7 +12382,7 @@
       </p:sp>
       <p:sp>
         <p:nvSpPr>
-          <p:cNvPr id="34" name="Rectangle 33"/>
+          <p:cNvPr id="77" name="Rectangle 76"/>
           <p:cNvSpPr/>
           <p:nvPr/>
         </p:nvSpPr>
@@ -10357,7 +12426,7 @@
       </p:sp>
       <p:sp>
         <p:nvSpPr>
-          <p:cNvPr id="35" name="TextBox 34"/>
+          <p:cNvPr id="78" name="TextBox 77"/>
           <p:cNvSpPr txBox="1"/>
           <p:nvPr/>
         </p:nvSpPr>
@@ -10392,7 +12461,7 @@
       </p:sp>
       <p:sp>
         <p:nvSpPr>
-          <p:cNvPr id="36" name="TextBox 35"/>
+          <p:cNvPr id="79" name="TextBox 78"/>
           <p:cNvSpPr txBox="1"/>
           <p:nvPr/>
         </p:nvSpPr>
@@ -10420,14 +12489,14 @@
                 </a:solidFill>
                 <a:latin typeface="Calibri"/>
               </a:rPr>
-              <a:t> 1,277.55</a:t>
-            </a:r>
-          </a:p>
-        </p:txBody>
-      </p:sp>
-      <p:sp>
-        <p:nvSpPr>
-          <p:cNvPr id="37" name="TextBox 36"/>
+              <a:t>INR 1,277.55</a:t>
+            </a:r>
+          </a:p>
+        </p:txBody>
+      </p:sp>
+      <p:sp>
+        <p:nvSpPr>
+          <p:cNvPr id="80" name="TextBox 79"/>
           <p:cNvSpPr txBox="1"/>
           <p:nvPr/>
         </p:nvSpPr>
@@ -10455,14 +12524,49 @@
                 </a:solidFill>
                 <a:latin typeface="Calibri"/>
               </a:rPr>
-              <a:t>Range   595 — 1,430</a:t>
-            </a:r>
-          </a:p>
-        </p:txBody>
-      </p:sp>
-      <p:sp>
-        <p:nvSpPr>
-          <p:cNvPr id="38" name="Rectangle 37"/>
+              <a:t>Range  INR 595 — 1,430</a:t>
+            </a:r>
+          </a:p>
+        </p:txBody>
+      </p:sp>
+      <p:sp>
+        <p:nvSpPr>
+          <p:cNvPr id="81" name="TextBox 80"/>
+          <p:cNvSpPr txBox="1"/>
+          <p:nvPr/>
+        </p:nvSpPr>
+        <p:spPr>
+          <a:xfrm>
+            <a:off x="2593848" y="8750808"/>
+            <a:ext cx="1706879" cy="164592"/>
+          </a:xfrm>
+          <a:prstGeom prst="rect">
+            <a:avLst/>
+          </a:prstGeom>
+          <a:noFill/>
+        </p:spPr>
+        <p:txBody>
+          <a:bodyPr wrap="square" lIns="0" rIns="0" tIns="0" bIns="0" anchor="t">
+            <a:spAutoFit/>
+          </a:bodyPr>
+          <a:lstStyle/>
+          <a:p>
+            <a:pPr algn="l"/>
+            <a:r>
+              <a:rPr sz="900" b="0">
+                <a:solidFill>
+                  <a:srgbClr val="2F7D4F"/>
+                </a:solidFill>
+                <a:latin typeface="Calibri"/>
+              </a:rPr>
+              <a:t>Implied +5.2% vs last close</a:t>
+            </a:r>
+          </a:p>
+        </p:txBody>
+      </p:sp>
+      <p:sp>
+        <p:nvSpPr>
+          <p:cNvPr id="82" name="Rectangle 81"/>
           <p:cNvSpPr/>
           <p:nvPr/>
         </p:nvSpPr>
@@ -10508,7 +12612,7 @@
       </p:sp>
       <p:sp>
         <p:nvSpPr>
-          <p:cNvPr id="39" name="Rectangle 38"/>
+          <p:cNvPr id="83" name="Rectangle 82"/>
           <p:cNvSpPr/>
           <p:nvPr/>
         </p:nvSpPr>
@@ -10552,7 +12656,7 @@
       </p:sp>
       <p:sp>
         <p:nvSpPr>
-          <p:cNvPr id="40" name="TextBox 39"/>
+          <p:cNvPr id="84" name="TextBox 83"/>
           <p:cNvSpPr txBox="1"/>
           <p:nvPr/>
         </p:nvSpPr>
@@ -10587,14 +12691,14 @@
       </p:sp>
       <p:sp>
         <p:nvSpPr>
-          <p:cNvPr id="41" name="TextBox 40"/>
-          <p:cNvSpPr txBox="1"/>
-          <p:nvPr/>
-        </p:nvSpPr>
-        <p:spPr>
-          <a:xfrm>
-            <a:off x="4666488" y="8275320"/>
-            <a:ext cx="1706879" cy="182880"/>
+          <p:cNvPr id="85" name="TextBox 84"/>
+          <p:cNvSpPr txBox="1"/>
+          <p:nvPr/>
+        </p:nvSpPr>
+        <p:spPr>
+          <a:xfrm>
+            <a:off x="4666488" y="8220456"/>
+            <a:ext cx="502920" cy="182880"/>
           </a:xfrm>
           <a:prstGeom prst="rect">
             <a:avLst/>
@@ -10609,20 +12713,195 @@
           <a:p>
             <a:pPr algn="l"/>
             <a:r>
-              <a:rPr sz="900" b="0">
-                <a:solidFill>
-                  <a:srgbClr val="9A9A9A"/>
-                </a:solidFill>
-                <a:latin typeface="Calibri"/>
-              </a:rPr>
-              <a:t>No broker actions in feed</a:t>
-            </a:r>
-          </a:p>
-        </p:txBody>
-      </p:sp>
-      <p:sp>
-        <p:nvSpPr>
-          <p:cNvPr id="42" name="Rectangle 41"/>
+              <a:rPr sz="1000" b="0">
+                <a:solidFill>
+                  <a:srgbClr val="5C5C5C"/>
+                </a:solidFill>
+                <a:latin typeface="Calibri"/>
+              </a:rPr>
+              <a:t>May. 05</a:t>
+            </a:r>
+          </a:p>
+        </p:txBody>
+      </p:sp>
+      <p:sp>
+        <p:nvSpPr>
+          <p:cNvPr id="86" name="TextBox 85"/>
+          <p:cNvSpPr txBox="1"/>
+          <p:nvPr/>
+        </p:nvSpPr>
+        <p:spPr>
+          <a:xfrm>
+            <a:off x="5196840" y="8220456"/>
+            <a:ext cx="1176527" cy="182880"/>
+          </a:xfrm>
+          <a:prstGeom prst="rect">
+            <a:avLst/>
+          </a:prstGeom>
+          <a:noFill/>
+        </p:spPr>
+        <p:txBody>
+          <a:bodyPr wrap="square" lIns="0" rIns="0" tIns="0" bIns="0" anchor="t">
+            <a:spAutoFit/>
+          </a:bodyPr>
+          <a:lstStyle/>
+          <a:p>
+            <a:pPr algn="l"/>
+            <a:r>
+              <a:rPr sz="1000" b="0">
+                <a:solidFill>
+                  <a:srgbClr val="1A1A1A"/>
+                </a:solidFill>
+                <a:latin typeface="Calibri"/>
+              </a:rPr>
+              <a:t>Nomura Adjusts Jindal Steel &amp; Power's Price Target to INR1,350 From INR1,280, Keeps at Buy</a:t>
+            </a:r>
+          </a:p>
+        </p:txBody>
+      </p:sp>
+      <p:sp>
+        <p:nvSpPr>
+          <p:cNvPr id="87" name="TextBox 86"/>
+          <p:cNvSpPr txBox="1"/>
+          <p:nvPr/>
+        </p:nvSpPr>
+        <p:spPr>
+          <a:xfrm>
+            <a:off x="4666488" y="8458200"/>
+            <a:ext cx="502920" cy="182880"/>
+          </a:xfrm>
+          <a:prstGeom prst="rect">
+            <a:avLst/>
+          </a:prstGeom>
+          <a:noFill/>
+        </p:spPr>
+        <p:txBody>
+          <a:bodyPr wrap="square" lIns="0" rIns="0" tIns="0" bIns="0" anchor="t">
+            <a:spAutoFit/>
+          </a:bodyPr>
+          <a:lstStyle/>
+          <a:p>
+            <a:pPr algn="l"/>
+            <a:r>
+              <a:rPr sz="1000" b="0">
+                <a:solidFill>
+                  <a:srgbClr val="5C5C5C"/>
+                </a:solidFill>
+                <a:latin typeface="Calibri"/>
+              </a:rPr>
+              <a:t>May. 04</a:t>
+            </a:r>
+          </a:p>
+        </p:txBody>
+      </p:sp>
+      <p:sp>
+        <p:nvSpPr>
+          <p:cNvPr id="88" name="TextBox 87"/>
+          <p:cNvSpPr txBox="1"/>
+          <p:nvPr/>
+        </p:nvSpPr>
+        <p:spPr>
+          <a:xfrm>
+            <a:off x="5196840" y="8458200"/>
+            <a:ext cx="1176527" cy="182880"/>
+          </a:xfrm>
+          <a:prstGeom prst="rect">
+            <a:avLst/>
+          </a:prstGeom>
+          <a:noFill/>
+        </p:spPr>
+        <p:txBody>
+          <a:bodyPr wrap="square" lIns="0" rIns="0" tIns="0" bIns="0" anchor="t">
+            <a:spAutoFit/>
+          </a:bodyPr>
+          <a:lstStyle/>
+          <a:p>
+            <a:pPr algn="l"/>
+            <a:r>
+              <a:rPr sz="1000" b="0">
+                <a:solidFill>
+                  <a:srgbClr val="1A1A1A"/>
+                </a:solidFill>
+                <a:latin typeface="Calibri"/>
+              </a:rPr>
+              <a:t>Centrum Broking Upgrades Jindal Steel &amp; Power to Buy from Neutral; Price Target is INR1,355</a:t>
+            </a:r>
+          </a:p>
+        </p:txBody>
+      </p:sp>
+      <p:sp>
+        <p:nvSpPr>
+          <p:cNvPr id="89" name="TextBox 88"/>
+          <p:cNvSpPr txBox="1"/>
+          <p:nvPr/>
+        </p:nvSpPr>
+        <p:spPr>
+          <a:xfrm>
+            <a:off x="4666488" y="8695944"/>
+            <a:ext cx="502920" cy="182880"/>
+          </a:xfrm>
+          <a:prstGeom prst="rect">
+            <a:avLst/>
+          </a:prstGeom>
+          <a:noFill/>
+        </p:spPr>
+        <p:txBody>
+          <a:bodyPr wrap="square" lIns="0" rIns="0" tIns="0" bIns="0" anchor="t">
+            <a:spAutoFit/>
+          </a:bodyPr>
+          <a:lstStyle/>
+          <a:p>
+            <a:pPr algn="l"/>
+            <a:r>
+              <a:rPr sz="1000" b="0">
+                <a:solidFill>
+                  <a:srgbClr val="5C5C5C"/>
+                </a:solidFill>
+                <a:latin typeface="Calibri"/>
+              </a:rPr>
+              <a:t>Feb. 02</a:t>
+            </a:r>
+          </a:p>
+        </p:txBody>
+      </p:sp>
+      <p:sp>
+        <p:nvSpPr>
+          <p:cNvPr id="90" name="TextBox 89"/>
+          <p:cNvSpPr txBox="1"/>
+          <p:nvPr/>
+        </p:nvSpPr>
+        <p:spPr>
+          <a:xfrm>
+            <a:off x="5196840" y="8695944"/>
+            <a:ext cx="1176527" cy="182880"/>
+          </a:xfrm>
+          <a:prstGeom prst="rect">
+            <a:avLst/>
+          </a:prstGeom>
+          <a:noFill/>
+        </p:spPr>
+        <p:txBody>
+          <a:bodyPr wrap="square" lIns="0" rIns="0" tIns="0" bIns="0" anchor="t">
+            <a:spAutoFit/>
+          </a:bodyPr>
+          <a:lstStyle/>
+          <a:p>
+            <a:pPr algn="l"/>
+            <a:r>
+              <a:rPr sz="1000" b="0">
+                <a:solidFill>
+                  <a:srgbClr val="1A1A1A"/>
+                </a:solidFill>
+                <a:latin typeface="Calibri"/>
+              </a:rPr>
+              <a:t>Nomura Adjusts Jindal Steel &amp; Power's Price Target to INR1,280 From INR1,150, Keeps at Buy</a:t>
+            </a:r>
+          </a:p>
+        </p:txBody>
+      </p:sp>
+      <p:sp>
+        <p:nvSpPr>
+          <p:cNvPr id="91" name="Rectangle 90"/>
           <p:cNvSpPr/>
           <p:nvPr/>
         </p:nvSpPr>
@@ -10666,7 +12945,7 @@
       </p:sp>
       <p:sp>
         <p:nvSpPr>
-          <p:cNvPr id="43" name="TextBox 42"/>
+          <p:cNvPr id="92" name="TextBox 91"/>
           <p:cNvSpPr txBox="1"/>
           <p:nvPr/>
         </p:nvSpPr>
@@ -10694,14 +12973,14 @@
                 </a:solidFill>
                 <a:latin typeface="Calibri"/>
               </a:rPr>
-              <a:t>Source: investing  |  Generated 13 May 2026  |  Analyst: Jabal Research</a:t>
-            </a:r>
-          </a:p>
-        </p:txBody>
-      </p:sp>
-      <p:sp>
-        <p:nvSpPr>
-          <p:cNvPr id="44" name="TextBox 43"/>
+              <a:t>Source: investing, marketscreener, yahoo  |  Generated 13 May 2026  |  Analyst: Jabal Research</a:t>
+            </a:r>
+          </a:p>
+        </p:txBody>
+      </p:sp>
+      <p:sp>
+        <p:nvSpPr>
+          <p:cNvPr id="93" name="TextBox 92"/>
           <p:cNvSpPr txBox="1"/>
           <p:nvPr/>
         </p:nvSpPr>
@@ -10736,7 +13015,7 @@
       </p:sp>
       <p:sp>
         <p:nvSpPr>
-          <p:cNvPr id="45" name="TextBox 44"/>
+          <p:cNvPr id="94" name="TextBox 93"/>
           <p:cNvSpPr txBox="1"/>
           <p:nvPr/>
         </p:nvSpPr>
@@ -10771,7 +13050,7 @@
       </p:sp>
       <p:sp>
         <p:nvSpPr>
-          <p:cNvPr id="46" name="TextBox 45"/>
+          <p:cNvPr id="95" name="TextBox 94"/>
           <p:cNvSpPr txBox="1"/>
           <p:nvPr/>
         </p:nvSpPr>

--- a/static/decks/JINDALSTEL.NS.pptx
+++ b/static/decks/JINDALSTEL.NS.pptx
@@ -11821,7 +11821,7 @@
                 </a:solidFill>
                 <a:latin typeface="Calibri"/>
               </a:rPr>
-              <a:t>—</a:t>
+              <a:t>$6.7B</a:t>
             </a:r>
           </a:p>
         </p:txBody>
@@ -11891,7 +11891,7 @@
                 </a:solidFill>
                 <a:latin typeface="Calibri"/>
               </a:rPr>
-              <a:t>—</a:t>
+              <a:t>+2.5% YTD</a:t>
             </a:r>
           </a:p>
         </p:txBody>
@@ -11922,11 +11922,11 @@
             <a:r>
               <a:rPr sz="1000" b="0">
                 <a:solidFill>
-                  <a:srgbClr val="1A1A1A"/>
-                </a:solidFill>
-                <a:latin typeface="Calibri"/>
-              </a:rPr>
-              <a:t>—</a:t>
+                  <a:srgbClr val="B83227"/>
+                </a:solidFill>
+                <a:latin typeface="Calibri"/>
+              </a:rPr>
+              <a:t>-10.7%</a:t>
             </a:r>
           </a:p>
         </p:txBody>

--- a/static/decks/JINDALSTEL.NS.pptx
+++ b/static/decks/JINDALSTEL.NS.pptx
@@ -6447,7 +6447,7 @@
                 </a:solidFill>
                 <a:latin typeface="Calibri"/>
               </a:rPr>
-              <a:t>Source: investing, marketscreener, yahoo  |  Generated 13 May 2026  |  Analyst: Jabal Research</a:t>
+              <a:t>Source: investing, marketscreener, yahoo  |  Generated 14 May 2026  |  Analyst: Jabal Research</a:t>
             </a:r>
           </a:p>
         </p:txBody>
@@ -9408,7 +9408,7 @@
                 </a:solidFill>
                 <a:latin typeface="Calibri"/>
               </a:rPr>
-              <a:t>Source: investing, marketscreener, yahoo  |  Generated 13 May 2026  |  Analyst: Jabal Research</a:t>
+              <a:t>Source: investing, marketscreener, yahoo  |  Generated 14 May 2026  |  Analyst: Jabal Research</a:t>
             </a:r>
           </a:p>
         </p:txBody>
@@ -12973,7 +12973,7 @@
                 </a:solidFill>
                 <a:latin typeface="Calibri"/>
               </a:rPr>
-              <a:t>Source: investing, marketscreener, yahoo  |  Generated 13 May 2026  |  Analyst: Jabal Research</a:t>
+              <a:t>Source: investing, marketscreener, yahoo  |  Generated 14 May 2026  |  Analyst: Jabal Research</a:t>
             </a:r>
           </a:p>
         </p:txBody>
